--- a/exports/pptx/lessons/senior-module-01-what-is-iks/day-01-hook.pptx
+++ b/exports/pptx/lessons/senior-module-01-what-is-iks/day-01-hook.pptx
@@ -3375,7 +3375,7 @@
         </p:nvSpPr>
         <p:spPr>
           <a:xfrm>
-            <a:off x="406301" y="4107507"/>
+            <a:off x="406301" y="2942779"/>
             <a:ext cx="8498026" cy="213271"/>
           </a:xfrm>
           <a:prstGeom prst="rect">
@@ -3401,15 +3401,15 @@
               <a:buNone/>
             </a:pPr>
             <a:r>
-              <a:rPr lang="en-US" sz="1200" dirty="0">
-                <a:solidFill>
-                  <a:srgbClr val="1A1A1A"/>
-                </a:solidFill>
-                <a:latin typeface="Georgia" pitchFamily="34" charset="0"/>
-                <a:ea typeface="Georgia" pitchFamily="34" charset="-122"/>
-                <a:cs typeface="Georgia" pitchFamily="34" charset="-120"/>
-              </a:rPr>
-              <a:t>Each is defensible. Pick one knowingly, not by default.</a:t>
+              <a:rPr lang="en-US" sz="1200" i="1" dirty="0">
+                <a:solidFill>
+                  <a:srgbClr val="1A1A1A"/>
+                </a:solidFill>
+                <a:latin typeface="Georgia" pitchFamily="34" charset="0"/>
+                <a:ea typeface="Georgia" pitchFamily="34" charset="-122"/>
+                <a:cs typeface="Georgia" pitchFamily="34" charset="-120"/>
+              </a:rPr>
+              <a:t>Each row: Framing · Strength · Weakness.</a:t>
             </a:r>
             <a:endParaRPr lang="en-US" sz="1200" dirty="0"/>
           </a:p>
@@ -3423,8 +3423,8 @@
         </p:nvSpPr>
         <p:spPr>
           <a:xfrm>
-            <a:off x="634901" y="4409629"/>
-            <a:ext cx="8102798" cy="281880"/>
+            <a:off x="634901" y="3244900"/>
+            <a:ext cx="8102798" cy="975122"/>
           </a:xfrm>
           <a:prstGeom prst="rect">
             <a:avLst/>
@@ -3455,7 +3455,7 @@
                 <a:ea typeface="Georgia" pitchFamily="34" charset="-122"/>
                 <a:cs typeface="Georgia" pitchFamily="34" charset="-120"/>
               </a:rPr>
-              <a:t>Read aloud NEP 2020 §4.6.</a:t>
+              <a:t>"IKS = pre-modern Indian intellectual production"</a:t>
             </a:r>
             <a:pPr algn="l" indent="0" marL="0">
               <a:lnSpc>
@@ -3475,7 +3475,95 @@
                 <a:ea typeface="Georgia" pitchFamily="34" charset="-122"/>
                 <a:cs typeface="Georgia" pitchFamily="34" charset="-120"/>
               </a:rPr>
-              <a:t> Discuss: what does the policy say IKS should include? What does it leave open?</a:t>
+              <a:t> — Inclusive · Vague boundaries</a:t>
+            </a:r>
+            <a:endParaRPr lang="en-US" sz="1200" dirty="0"/>
+          </a:p>
+          <a:p>
+            <a:pPr algn="l" marL="342900" indent="-342900">
+              <a:lnSpc>
+                <a:spcPts val="1620"/>
+              </a:lnSpc>
+              <a:spcAft>
+                <a:spcPts val="300"/>
+              </a:spcAft>
+              <a:buSzPct val="100000"/>
+              <a:buChar char="•"/>
+            </a:pPr>
+            <a:r>
+              <a:rPr lang="en-US" sz="1200" b="1" dirty="0">
+                <a:solidFill>
+                  <a:srgbClr val="1A1A1A"/>
+                </a:solidFill>
+                <a:latin typeface="Georgia" pitchFamily="34" charset="0"/>
+                <a:ea typeface="Georgia" pitchFamily="34" charset="-122"/>
+                <a:cs typeface="Georgia" pitchFamily="34" charset="-120"/>
+              </a:rPr>
+              <a:t>"IKS = canonical Brahmanical knowledge systems"</a:t>
+            </a:r>
+            <a:pPr algn="l" indent="0" marL="0">
+              <a:lnSpc>
+                <a:spcPts val="1620"/>
+              </a:lnSpc>
+              <a:spcAft>
+                <a:spcPts val="300"/>
+              </a:spcAft>
+              <a:buNone/>
+            </a:pPr>
+            <a:r>
+              <a:rPr lang="en-US" sz="1200" dirty="0">
+                <a:solidFill>
+                  <a:srgbClr val="1A1A1A"/>
+                </a:solidFill>
+                <a:latin typeface="Georgia" pitchFamily="34" charset="0"/>
+                <a:ea typeface="Georgia" pitchFamily="34" charset="-122"/>
+                <a:cs typeface="Georgia" pitchFamily="34" charset="-120"/>
+              </a:rPr>
+              <a:t> — Specific · Excludes Buddhist, Tantric, regional</a:t>
+            </a:r>
+            <a:endParaRPr lang="en-US" sz="1200" dirty="0"/>
+          </a:p>
+          <a:p>
+            <a:pPr algn="l" marL="342900" indent="-342900">
+              <a:lnSpc>
+                <a:spcPts val="1620"/>
+              </a:lnSpc>
+              <a:spcAft>
+                <a:spcPts val="300"/>
+              </a:spcAft>
+              <a:buSzPct val="100000"/>
+              <a:buChar char="•"/>
+            </a:pPr>
+            <a:r>
+              <a:rPr lang="en-US" sz="1200" b="1" dirty="0">
+                <a:solidFill>
+                  <a:srgbClr val="1A1A1A"/>
+                </a:solidFill>
+                <a:latin typeface="Georgia" pitchFamily="34" charset="0"/>
+                <a:ea typeface="Georgia" pitchFamily="34" charset="-122"/>
+                <a:cs typeface="Georgia" pitchFamily="34" charset="-120"/>
+              </a:rPr>
+              <a:t>"IKS = anything taught under the NEP §4.6 umbrella"</a:t>
+            </a:r>
+            <a:pPr algn="l" indent="0" marL="0">
+              <a:lnSpc>
+                <a:spcPts val="1620"/>
+              </a:lnSpc>
+              <a:spcAft>
+                <a:spcPts val="300"/>
+              </a:spcAft>
+              <a:buNone/>
+            </a:pPr>
+            <a:r>
+              <a:rPr lang="en-US" sz="1200" dirty="0">
+                <a:solidFill>
+                  <a:srgbClr val="1A1A1A"/>
+                </a:solidFill>
+                <a:latin typeface="Georgia" pitchFamily="34" charset="0"/>
+                <a:ea typeface="Georgia" pitchFamily="34" charset="-122"/>
+                <a:cs typeface="Georgia" pitchFamily="34" charset="-120"/>
+              </a:rPr>
+              <a:t> — Operational · Political construction; varies by implementer</a:t>
             </a:r>
             <a:endParaRPr lang="en-US" sz="1200" dirty="0"/>
           </a:p>
@@ -3489,7 +3577,121 @@
         </p:nvSpPr>
         <p:spPr>
           <a:xfrm>
-            <a:off x="406301" y="4856559"/>
+            <a:off x="406301" y="4308872"/>
+            <a:ext cx="8498026" cy="213271"/>
+          </a:xfrm>
+          <a:prstGeom prst="rect">
+            <a:avLst/>
+          </a:prstGeom>
+          <a:noFill/>
+          <a:ln/>
+        </p:spPr>
+        <p:txBody>
+          <a:bodyPr wrap="square" lIns="0" tIns="0" rIns="0" bIns="0" rtlCol="0" anchor="t"/>
+          <a:lstStyle/>
+          <a:p>
+            <a:pPr algn="l" indent="0" marL="0">
+              <a:lnSpc>
+                <a:spcPts val="1680"/>
+              </a:lnSpc>
+              <a:spcBef>
+                <a:spcPts val="300"/>
+              </a:spcBef>
+              <a:spcAft>
+                <a:spcPts val="300"/>
+              </a:spcAft>
+              <a:buNone/>
+            </a:pPr>
+            <a:r>
+              <a:rPr lang="en-US" sz="1200" dirty="0">
+                <a:solidFill>
+                  <a:srgbClr val="1A1A1A"/>
+                </a:solidFill>
+                <a:latin typeface="Georgia" pitchFamily="34" charset="0"/>
+                <a:ea typeface="Georgia" pitchFamily="34" charset="-122"/>
+                <a:cs typeface="Georgia" pitchFamily="34" charset="-120"/>
+              </a:rPr>
+              <a:t>Each is defensible. Pick one knowingly, not by default.</a:t>
+            </a:r>
+            <a:endParaRPr lang="en-US" sz="1200" dirty="0"/>
+          </a:p>
+        </p:txBody>
+      </p:sp>
+      <p:sp>
+        <p:nvSpPr>
+          <p:cNvPr id="11" name="Text 9"/>
+          <p:cNvSpPr/>
+          <p:nvPr/>
+        </p:nvSpPr>
+        <p:spPr>
+          <a:xfrm>
+            <a:off x="634901" y="4610993"/>
+            <a:ext cx="8102798" cy="281880"/>
+          </a:xfrm>
+          <a:prstGeom prst="rect">
+            <a:avLst/>
+          </a:prstGeom>
+          <a:noFill/>
+          <a:ln/>
+        </p:spPr>
+        <p:txBody>
+          <a:bodyPr wrap="square" lIns="0" tIns="0" rIns="0" bIns="0" rtlCol="0" anchor="t"/>
+          <a:lstStyle/>
+          <a:p>
+            <a:pPr algn="l" marL="342900" indent="-342900">
+              <a:lnSpc>
+                <a:spcPts val="1620"/>
+              </a:lnSpc>
+              <a:spcAft>
+                <a:spcPts val="300"/>
+              </a:spcAft>
+              <a:buSzPct val="100000"/>
+              <a:buChar char="•"/>
+            </a:pPr>
+            <a:r>
+              <a:rPr lang="en-US" sz="1200" b="1" dirty="0">
+                <a:solidFill>
+                  <a:srgbClr val="1A1A1A"/>
+                </a:solidFill>
+                <a:latin typeface="Georgia" pitchFamily="34" charset="0"/>
+                <a:ea typeface="Georgia" pitchFamily="34" charset="-122"/>
+                <a:cs typeface="Georgia" pitchFamily="34" charset="-120"/>
+              </a:rPr>
+              <a:t>Read aloud NEP 2020 §4.6.</a:t>
+            </a:r>
+            <a:pPr algn="l" indent="0" marL="0">
+              <a:lnSpc>
+                <a:spcPts val="1620"/>
+              </a:lnSpc>
+              <a:spcAft>
+                <a:spcPts val="300"/>
+              </a:spcAft>
+              <a:buNone/>
+            </a:pPr>
+            <a:r>
+              <a:rPr lang="en-US" sz="1200" dirty="0">
+                <a:solidFill>
+                  <a:srgbClr val="1A1A1A"/>
+                </a:solidFill>
+                <a:latin typeface="Georgia" pitchFamily="34" charset="0"/>
+                <a:ea typeface="Georgia" pitchFamily="34" charset="-122"/>
+                <a:cs typeface="Georgia" pitchFamily="34" charset="-120"/>
+              </a:rPr>
+              <a:t> Discuss: what does the policy say IKS should include? What does it leave open?</a:t>
+            </a:r>
+            <a:endParaRPr lang="en-US" sz="1200" dirty="0"/>
+          </a:p>
+        </p:txBody>
+      </p:sp>
+      <p:sp>
+        <p:nvSpPr>
+          <p:cNvPr id="12" name="Text 10"/>
+          <p:cNvSpPr/>
+          <p:nvPr/>
+        </p:nvSpPr>
+        <p:spPr>
+          <a:xfrm>
+            <a:off x="406301" y="5057924"/>
             <a:ext cx="8498026" cy="213271"/>
           </a:xfrm>
           <a:prstGeom prst="rect">

--- a/exports/pptx/lessons/senior-module-01-what-is-iks/day-01-hook.pptx
+++ b/exports/pptx/lessons/senior-module-01-what-is-iks/day-01-hook.pptx
@@ -15,9 +15,14 @@
     <p:sldId id="263" r:id="rId9"/>
     <p:sldId id="264" r:id="rId10"/>
     <p:sldId id="265" r:id="rId11"/>
+    <p:sldId id="266" r:id="rId12"/>
+    <p:sldId id="267" r:id="rId13"/>
+    <p:sldId id="268" r:id="rId14"/>
+    <p:sldId id="269" r:id="rId15"/>
+    <p:sldId id="270" r:id="rId16"/>
   </p:sldIdLst>
   <p:notesMasterIdLst>
-    <p:notesMasterId r:id="rId12"/>
+    <p:notesMasterId r:id="rId17"/>
   </p:notesMasterIdLst>
   <p:sldSz cx="9144000" cy="5143500"/>
   <p:notesSz cx="5143500" cy="9144000"/>
@@ -623,6 +628,446 @@
             <a:fld id="{F7021451-1387-4CA6-816F-3879F97B5CBC}" type="slidenum">
               <a:rPr lang="en-US"/>
               <a:t>10</a:t>
+            </a:fld>
+            <a:endParaRPr lang="en-US"/>
+          </a:p>
+        </p:txBody>
+      </p:sp>
+    </p:spTree>
+    <p:extLst>
+      <p:ext uri="{BB962C8B-B14F-4D97-AF65-F5344CB8AC3E}">
+        <p14:creationId xmlns:p14="http://schemas.microsoft.com/office/powerpoint/2010/main" val="1024086991"/>
+      </p:ext>
+    </p:extLst>
+  </p:cSld>
+  <p:clrMapOvr>
+    <a:masterClrMapping/>
+  </p:clrMapOvr>
+</p:notes>
+</file>
+
+<file path=ppt/notesSlides/notesSlide11.xml><?xml version="1.0" encoding="utf-8"?>
+<p:notes xmlns:a="http://schemas.openxmlformats.org/drawingml/2006/main" xmlns:r="http://schemas.openxmlformats.org/officeDocument/2006/relationships" xmlns:p="http://schemas.openxmlformats.org/presentationml/2006/main">
+  <p:cSld>
+    <p:spTree>
+      <p:nvGrpSpPr>
+        <p:cNvPr id="1" name=""/>
+        <p:cNvGrpSpPr/>
+        <p:nvPr/>
+      </p:nvGrpSpPr>
+      <p:grpSpPr>
+        <a:xfrm>
+          <a:off x="0" y="0"/>
+          <a:ext cx="0" cy="0"/>
+          <a:chOff x="0" y="0"/>
+          <a:chExt cx="0" cy="0"/>
+        </a:xfrm>
+      </p:grpSpPr>
+      <p:sp>
+        <p:nvSpPr>
+          <p:cNvPr id="2" name="Slide Image Placeholder 1"/>
+          <p:cNvSpPr>
+            <a:spLocks noGrp="1" noRot="1" noChangeAspect="1"/>
+          </p:cNvSpPr>
+          <p:nvPr>
+            <p:ph type="sldImg"/>
+          </p:nvPr>
+        </p:nvSpPr>
+        <p:spPr/>
+      </p:sp>
+      <p:sp>
+        <p:nvSpPr>
+          <p:cNvPr id="3" name="Notes Placeholder 2"/>
+          <p:cNvSpPr>
+            <a:spLocks noGrp="1"/>
+          </p:cNvSpPr>
+          <p:nvPr>
+            <p:ph type="body" idx="1"/>
+          </p:nvPr>
+        </p:nvSpPr>
+        <p:spPr/>
+        <p:txBody>
+          <a:bodyPr/>
+          <a:lstStyle/>
+          <a:p>
+            <a:r>
+              <a:rPr lang="en-US" dirty="0"/>
+              <a:t/>
+            </a:r>
+            <a:endParaRPr lang="en-US" dirty="0"/>
+          </a:p>
+        </p:txBody>
+      </p:sp>
+      <p:sp>
+        <p:nvSpPr>
+          <p:cNvPr id="4" name="Slide Number Placeholder 3"/>
+          <p:cNvSpPr>
+            <a:spLocks noGrp="1"/>
+          </p:cNvSpPr>
+          <p:nvPr>
+            <p:ph type="sldNum" sz="quarter" idx="10"/>
+          </p:nvPr>
+        </p:nvSpPr>
+        <p:spPr/>
+        <p:txBody>
+          <a:bodyPr/>
+          <a:lstStyle/>
+          <a:p>
+            <a:fld id="{F7021451-1387-4CA6-816F-3879F97B5CBC}" type="slidenum">
+              <a:rPr lang="en-US"/>
+              <a:t>11</a:t>
+            </a:fld>
+            <a:endParaRPr lang="en-US"/>
+          </a:p>
+        </p:txBody>
+      </p:sp>
+    </p:spTree>
+    <p:extLst>
+      <p:ext uri="{BB962C8B-B14F-4D97-AF65-F5344CB8AC3E}">
+        <p14:creationId xmlns:p14="http://schemas.microsoft.com/office/powerpoint/2010/main" val="1024086991"/>
+      </p:ext>
+    </p:extLst>
+  </p:cSld>
+  <p:clrMapOvr>
+    <a:masterClrMapping/>
+  </p:clrMapOvr>
+</p:notes>
+</file>
+
+<file path=ppt/notesSlides/notesSlide12.xml><?xml version="1.0" encoding="utf-8"?>
+<p:notes xmlns:a="http://schemas.openxmlformats.org/drawingml/2006/main" xmlns:r="http://schemas.openxmlformats.org/officeDocument/2006/relationships" xmlns:p="http://schemas.openxmlformats.org/presentationml/2006/main">
+  <p:cSld>
+    <p:spTree>
+      <p:nvGrpSpPr>
+        <p:cNvPr id="1" name=""/>
+        <p:cNvGrpSpPr/>
+        <p:nvPr/>
+      </p:nvGrpSpPr>
+      <p:grpSpPr>
+        <a:xfrm>
+          <a:off x="0" y="0"/>
+          <a:ext cx="0" cy="0"/>
+          <a:chOff x="0" y="0"/>
+          <a:chExt cx="0" cy="0"/>
+        </a:xfrm>
+      </p:grpSpPr>
+      <p:sp>
+        <p:nvSpPr>
+          <p:cNvPr id="2" name="Slide Image Placeholder 1"/>
+          <p:cNvSpPr>
+            <a:spLocks noGrp="1" noRot="1" noChangeAspect="1"/>
+          </p:cNvSpPr>
+          <p:nvPr>
+            <p:ph type="sldImg"/>
+          </p:nvPr>
+        </p:nvSpPr>
+        <p:spPr/>
+      </p:sp>
+      <p:sp>
+        <p:nvSpPr>
+          <p:cNvPr id="3" name="Notes Placeholder 2"/>
+          <p:cNvSpPr>
+            <a:spLocks noGrp="1"/>
+          </p:cNvSpPr>
+          <p:nvPr>
+            <p:ph type="body" idx="1"/>
+          </p:nvPr>
+        </p:nvSpPr>
+        <p:spPr/>
+        <p:txBody>
+          <a:bodyPr/>
+          <a:lstStyle/>
+          <a:p>
+            <a:r>
+              <a:rPr lang="en-US" dirty="0"/>
+              <a:t/>
+            </a:r>
+            <a:endParaRPr lang="en-US" dirty="0"/>
+          </a:p>
+        </p:txBody>
+      </p:sp>
+      <p:sp>
+        <p:nvSpPr>
+          <p:cNvPr id="4" name="Slide Number Placeholder 3"/>
+          <p:cNvSpPr>
+            <a:spLocks noGrp="1"/>
+          </p:cNvSpPr>
+          <p:nvPr>
+            <p:ph type="sldNum" sz="quarter" idx="10"/>
+          </p:nvPr>
+        </p:nvSpPr>
+        <p:spPr/>
+        <p:txBody>
+          <a:bodyPr/>
+          <a:lstStyle/>
+          <a:p>
+            <a:fld id="{F7021451-1387-4CA6-816F-3879F97B5CBC}" type="slidenum">
+              <a:rPr lang="en-US"/>
+              <a:t>12</a:t>
+            </a:fld>
+            <a:endParaRPr lang="en-US"/>
+          </a:p>
+        </p:txBody>
+      </p:sp>
+    </p:spTree>
+    <p:extLst>
+      <p:ext uri="{BB962C8B-B14F-4D97-AF65-F5344CB8AC3E}">
+        <p14:creationId xmlns:p14="http://schemas.microsoft.com/office/powerpoint/2010/main" val="1024086991"/>
+      </p:ext>
+    </p:extLst>
+  </p:cSld>
+  <p:clrMapOvr>
+    <a:masterClrMapping/>
+  </p:clrMapOvr>
+</p:notes>
+</file>
+
+<file path=ppt/notesSlides/notesSlide13.xml><?xml version="1.0" encoding="utf-8"?>
+<p:notes xmlns:a="http://schemas.openxmlformats.org/drawingml/2006/main" xmlns:r="http://schemas.openxmlformats.org/officeDocument/2006/relationships" xmlns:p="http://schemas.openxmlformats.org/presentationml/2006/main">
+  <p:cSld>
+    <p:spTree>
+      <p:nvGrpSpPr>
+        <p:cNvPr id="1" name=""/>
+        <p:cNvGrpSpPr/>
+        <p:nvPr/>
+      </p:nvGrpSpPr>
+      <p:grpSpPr>
+        <a:xfrm>
+          <a:off x="0" y="0"/>
+          <a:ext cx="0" cy="0"/>
+          <a:chOff x="0" y="0"/>
+          <a:chExt cx="0" cy="0"/>
+        </a:xfrm>
+      </p:grpSpPr>
+      <p:sp>
+        <p:nvSpPr>
+          <p:cNvPr id="2" name="Slide Image Placeholder 1"/>
+          <p:cNvSpPr>
+            <a:spLocks noGrp="1" noRot="1" noChangeAspect="1"/>
+          </p:cNvSpPr>
+          <p:nvPr>
+            <p:ph type="sldImg"/>
+          </p:nvPr>
+        </p:nvSpPr>
+        <p:spPr/>
+      </p:sp>
+      <p:sp>
+        <p:nvSpPr>
+          <p:cNvPr id="3" name="Notes Placeholder 2"/>
+          <p:cNvSpPr>
+            <a:spLocks noGrp="1"/>
+          </p:cNvSpPr>
+          <p:nvPr>
+            <p:ph type="body" idx="1"/>
+          </p:nvPr>
+        </p:nvSpPr>
+        <p:spPr/>
+        <p:txBody>
+          <a:bodyPr/>
+          <a:lstStyle/>
+          <a:p>
+            <a:r>
+              <a:rPr lang="en-US" dirty="0"/>
+              <a:t/>
+            </a:r>
+            <a:endParaRPr lang="en-US" dirty="0"/>
+          </a:p>
+        </p:txBody>
+      </p:sp>
+      <p:sp>
+        <p:nvSpPr>
+          <p:cNvPr id="4" name="Slide Number Placeholder 3"/>
+          <p:cNvSpPr>
+            <a:spLocks noGrp="1"/>
+          </p:cNvSpPr>
+          <p:nvPr>
+            <p:ph type="sldNum" sz="quarter" idx="10"/>
+          </p:nvPr>
+        </p:nvSpPr>
+        <p:spPr/>
+        <p:txBody>
+          <a:bodyPr/>
+          <a:lstStyle/>
+          <a:p>
+            <a:fld id="{F7021451-1387-4CA6-816F-3879F97B5CBC}" type="slidenum">
+              <a:rPr lang="en-US"/>
+              <a:t>13</a:t>
+            </a:fld>
+            <a:endParaRPr lang="en-US"/>
+          </a:p>
+        </p:txBody>
+      </p:sp>
+    </p:spTree>
+    <p:extLst>
+      <p:ext uri="{BB962C8B-B14F-4D97-AF65-F5344CB8AC3E}">
+        <p14:creationId xmlns:p14="http://schemas.microsoft.com/office/powerpoint/2010/main" val="1024086991"/>
+      </p:ext>
+    </p:extLst>
+  </p:cSld>
+  <p:clrMapOvr>
+    <a:masterClrMapping/>
+  </p:clrMapOvr>
+</p:notes>
+</file>
+
+<file path=ppt/notesSlides/notesSlide14.xml><?xml version="1.0" encoding="utf-8"?>
+<p:notes xmlns:a="http://schemas.openxmlformats.org/drawingml/2006/main" xmlns:r="http://schemas.openxmlformats.org/officeDocument/2006/relationships" xmlns:p="http://schemas.openxmlformats.org/presentationml/2006/main">
+  <p:cSld>
+    <p:spTree>
+      <p:nvGrpSpPr>
+        <p:cNvPr id="1" name=""/>
+        <p:cNvGrpSpPr/>
+        <p:nvPr/>
+      </p:nvGrpSpPr>
+      <p:grpSpPr>
+        <a:xfrm>
+          <a:off x="0" y="0"/>
+          <a:ext cx="0" cy="0"/>
+          <a:chOff x="0" y="0"/>
+          <a:chExt cx="0" cy="0"/>
+        </a:xfrm>
+      </p:grpSpPr>
+      <p:sp>
+        <p:nvSpPr>
+          <p:cNvPr id="2" name="Slide Image Placeholder 1"/>
+          <p:cNvSpPr>
+            <a:spLocks noGrp="1" noRot="1" noChangeAspect="1"/>
+          </p:cNvSpPr>
+          <p:nvPr>
+            <p:ph type="sldImg"/>
+          </p:nvPr>
+        </p:nvSpPr>
+        <p:spPr/>
+      </p:sp>
+      <p:sp>
+        <p:nvSpPr>
+          <p:cNvPr id="3" name="Notes Placeholder 2"/>
+          <p:cNvSpPr>
+            <a:spLocks noGrp="1"/>
+          </p:cNvSpPr>
+          <p:nvPr>
+            <p:ph type="body" idx="1"/>
+          </p:nvPr>
+        </p:nvSpPr>
+        <p:spPr/>
+        <p:txBody>
+          <a:bodyPr/>
+          <a:lstStyle/>
+          <a:p>
+            <a:r>
+              <a:rPr lang="en-US" dirty="0"/>
+              <a:t/>
+            </a:r>
+            <a:endParaRPr lang="en-US" dirty="0"/>
+          </a:p>
+        </p:txBody>
+      </p:sp>
+      <p:sp>
+        <p:nvSpPr>
+          <p:cNvPr id="4" name="Slide Number Placeholder 3"/>
+          <p:cNvSpPr>
+            <a:spLocks noGrp="1"/>
+          </p:cNvSpPr>
+          <p:nvPr>
+            <p:ph type="sldNum" sz="quarter" idx="10"/>
+          </p:nvPr>
+        </p:nvSpPr>
+        <p:spPr/>
+        <p:txBody>
+          <a:bodyPr/>
+          <a:lstStyle/>
+          <a:p>
+            <a:fld id="{F7021451-1387-4CA6-816F-3879F97B5CBC}" type="slidenum">
+              <a:rPr lang="en-US"/>
+              <a:t>14</a:t>
+            </a:fld>
+            <a:endParaRPr lang="en-US"/>
+          </a:p>
+        </p:txBody>
+      </p:sp>
+    </p:spTree>
+    <p:extLst>
+      <p:ext uri="{BB962C8B-B14F-4D97-AF65-F5344CB8AC3E}">
+        <p14:creationId xmlns:p14="http://schemas.microsoft.com/office/powerpoint/2010/main" val="1024086991"/>
+      </p:ext>
+    </p:extLst>
+  </p:cSld>
+  <p:clrMapOvr>
+    <a:masterClrMapping/>
+  </p:clrMapOvr>
+</p:notes>
+</file>
+
+<file path=ppt/notesSlides/notesSlide15.xml><?xml version="1.0" encoding="utf-8"?>
+<p:notes xmlns:a="http://schemas.openxmlformats.org/drawingml/2006/main" xmlns:r="http://schemas.openxmlformats.org/officeDocument/2006/relationships" xmlns:p="http://schemas.openxmlformats.org/presentationml/2006/main">
+  <p:cSld>
+    <p:spTree>
+      <p:nvGrpSpPr>
+        <p:cNvPr id="1" name=""/>
+        <p:cNvGrpSpPr/>
+        <p:nvPr/>
+      </p:nvGrpSpPr>
+      <p:grpSpPr>
+        <a:xfrm>
+          <a:off x="0" y="0"/>
+          <a:ext cx="0" cy="0"/>
+          <a:chOff x="0" y="0"/>
+          <a:chExt cx="0" cy="0"/>
+        </a:xfrm>
+      </p:grpSpPr>
+      <p:sp>
+        <p:nvSpPr>
+          <p:cNvPr id="2" name="Slide Image Placeholder 1"/>
+          <p:cNvSpPr>
+            <a:spLocks noGrp="1" noRot="1" noChangeAspect="1"/>
+          </p:cNvSpPr>
+          <p:nvPr>
+            <p:ph type="sldImg"/>
+          </p:nvPr>
+        </p:nvSpPr>
+        <p:spPr/>
+      </p:sp>
+      <p:sp>
+        <p:nvSpPr>
+          <p:cNvPr id="3" name="Notes Placeholder 2"/>
+          <p:cNvSpPr>
+            <a:spLocks noGrp="1"/>
+          </p:cNvSpPr>
+          <p:nvPr>
+            <p:ph type="body" idx="1"/>
+          </p:nvPr>
+        </p:nvSpPr>
+        <p:spPr/>
+        <p:txBody>
+          <a:bodyPr/>
+          <a:lstStyle/>
+          <a:p>
+            <a:r>
+              <a:rPr lang="en-US" dirty="0"/>
+              <a:t/>
+            </a:r>
+            <a:endParaRPr lang="en-US" dirty="0"/>
+          </a:p>
+        </p:txBody>
+      </p:sp>
+      <p:sp>
+        <p:nvSpPr>
+          <p:cNvPr id="4" name="Slide Number Placeholder 3"/>
+          <p:cNvSpPr>
+            <a:spLocks noGrp="1"/>
+          </p:cNvSpPr>
+          <p:nvPr>
+            <p:ph type="sldNum" sz="quarter" idx="10"/>
+          </p:nvPr>
+        </p:nvSpPr>
+        <p:spPr/>
+        <p:txBody>
+          <a:bodyPr/>
+          <a:lstStyle/>
+          <a:p>
+            <a:fld id="{F7021451-1387-4CA6-816F-3879F97B5CBC}" type="slidenum">
+              <a:rPr lang="en-US"/>
+              <a:t>15</a:t>
             </a:fld>
             <a:endParaRPr lang="en-US"/>
           </a:p>
@@ -1876,102 +2321,6 @@
         </p:nvSpPr>
         <p:spPr>
           <a:xfrm>
-            <a:off x="406301" y="1223963"/>
-            <a:ext cx="8498026" cy="274290"/>
-          </a:xfrm>
-          <a:prstGeom prst="rect">
-            <a:avLst/>
-          </a:prstGeom>
-          <a:noFill/>
-          <a:ln/>
-        </p:spPr>
-        <p:txBody>
-          <a:bodyPr wrap="square" lIns="0" tIns="0" rIns="0" bIns="0" rtlCol="0" anchor="t"/>
-          <a:lstStyle/>
-          <a:p>
-            <a:pPr algn="l" indent="0" marL="0">
-              <a:lnSpc>
-                <a:spcPts val="2160"/>
-              </a:lnSpc>
-              <a:spcBef>
-                <a:spcPts val="600"/>
-              </a:spcBef>
-              <a:spcAft>
-                <a:spcPts val="800"/>
-              </a:spcAft>
-              <a:buNone/>
-            </a:pPr>
-            <a:r>
-              <a:rPr lang="en-US" sz="1800" b="1" dirty="0">
-                <a:solidFill>
-                  <a:srgbClr val="997929"/>
-                </a:solidFill>
-                <a:latin typeface="Times New Roman" pitchFamily="34" charset="0"/>
-                <a:ea typeface="Times New Roman" pitchFamily="34" charset="-122"/>
-                <a:cs typeface="Times New Roman" pitchFamily="34" charset="-120"/>
-              </a:rPr>
-              <a:t>Learning objective</a:t>
-            </a:r>
-            <a:endParaRPr lang="en-US" sz="1800" dirty="0"/>
-          </a:p>
-        </p:txBody>
-      </p:sp>
-      <p:sp>
-        <p:nvSpPr>
-          <p:cNvPr id="6" name="Text 4"/>
-          <p:cNvSpPr/>
-          <p:nvPr/>
-        </p:nvSpPr>
-        <p:spPr>
-          <a:xfrm>
-            <a:off x="406301" y="1637854"/>
-            <a:ext cx="8498026" cy="426541"/>
-          </a:xfrm>
-          <a:prstGeom prst="rect">
-            <a:avLst/>
-          </a:prstGeom>
-          <a:noFill/>
-          <a:ln/>
-        </p:spPr>
-        <p:txBody>
-          <a:bodyPr wrap="square" lIns="0" tIns="0" rIns="0" bIns="0" rtlCol="0" anchor="t"/>
-          <a:lstStyle/>
-          <a:p>
-            <a:pPr algn="l" indent="0" marL="0">
-              <a:lnSpc>
-                <a:spcPts val="1680"/>
-              </a:lnSpc>
-              <a:spcBef>
-                <a:spcPts val="300"/>
-              </a:spcBef>
-              <a:spcAft>
-                <a:spcPts val="300"/>
-              </a:spcAft>
-              <a:buNone/>
-            </a:pPr>
-            <a:r>
-              <a:rPr lang="en-US" sz="1200" dirty="0">
-                <a:solidFill>
-                  <a:srgbClr val="1A1A1A"/>
-                </a:solidFill>
-                <a:latin typeface="Georgia" pitchFamily="34" charset="0"/>
-                <a:ea typeface="Georgia" pitchFamily="34" charset="-122"/>
-                <a:cs typeface="Georgia" pitchFamily="34" charset="-120"/>
-              </a:rPr>
-              <a:t>Students engage the boundary problem — what "IKS" denotes, what it doesn't, and why the label itself is a recent construction.</a:t>
-            </a:r>
-            <a:endParaRPr lang="en-US" sz="1200" dirty="0"/>
-          </a:p>
-        </p:txBody>
-      </p:sp>
-      <p:sp>
-        <p:nvSpPr>
-          <p:cNvPr id="7" name="Text 5"/>
-          <p:cNvSpPr/>
-          <p:nvPr/>
-        </p:nvSpPr>
-        <p:spPr>
-          <a:xfrm>
             <a:off x="406301" y="4434929"/>
             <a:ext cx="8498026" cy="213271"/>
           </a:xfrm>
@@ -2116,7 +2465,7 @@
                 <a:ea typeface="Times New Roman" pitchFamily="34" charset="-122"/>
                 <a:cs typeface="Times New Roman" pitchFamily="34" charset="-120"/>
               </a:rPr>
-              <a:t>Citation(s) used</a:t>
+              <a:t>Core (25 min) (cont.)</a:t>
             </a:r>
             <a:endParaRPr lang="en-US" sz="1800" dirty="0"/>
           </a:p>
@@ -2130,8 +2479,8 @@
         </p:nvSpPr>
         <p:spPr>
           <a:xfrm>
-            <a:off x="406301" y="870942"/>
-            <a:ext cx="8498026" cy="213271"/>
+            <a:off x="634901" y="883593"/>
+            <a:ext cx="8102798" cy="281880"/>
           </a:xfrm>
           <a:prstGeom prst="rect">
             <a:avLst/>
@@ -2143,20 +2492,18 @@
           <a:bodyPr wrap="square" lIns="0" tIns="0" rIns="0" bIns="0" rtlCol="0" anchor="t"/>
           <a:lstStyle/>
           <a:p>
-            <a:pPr algn="l" indent="0" marL="0">
-              <a:lnSpc>
-                <a:spcPts val="1680"/>
-              </a:lnSpc>
-              <a:spcBef>
-                <a:spcPts val="300"/>
-              </a:spcBef>
-              <a:spcAft>
-                <a:spcPts val="300"/>
-              </a:spcAft>
-              <a:buNone/>
-            </a:pPr>
-            <a:r>
-              <a:rPr lang="en-US" sz="1200" dirty="0">
+            <a:pPr algn="l" marL="342900" indent="-342900">
+              <a:lnSpc>
+                <a:spcPts val="1620"/>
+              </a:lnSpc>
+              <a:spcAft>
+                <a:spcPts val="300"/>
+              </a:spcAft>
+              <a:buSzPct val="100000"/>
+              <a:buChar char="•"/>
+            </a:pPr>
+            <a:r>
+              <a:rPr lang="en-US" sz="1200" b="1" dirty="0">
                 <a:solidFill>
                   <a:srgbClr val="1A1A1A"/>
                 </a:solidFill>
@@ -2164,42 +2511,16 @@
                 <a:ea typeface="Georgia" pitchFamily="34" charset="-122"/>
                 <a:cs typeface="Georgia" pitchFamily="34" charset="-120"/>
               </a:rPr>
-              <a:t>– Government of India (2020). NEP 2020 §4.6.</a:t>
-            </a:r>
-            <a:endParaRPr lang="en-US" sz="1200" dirty="0"/>
-          </a:p>
-        </p:txBody>
-      </p:sp>
-      <p:sp>
-        <p:nvSpPr>
-          <p:cNvPr id="5" name="Text 3"/>
-          <p:cNvSpPr/>
-          <p:nvPr/>
-        </p:nvSpPr>
-        <p:spPr>
-          <a:xfrm>
-            <a:off x="634901" y="1173063"/>
-            <a:ext cx="8102798" cy="300930"/>
-          </a:xfrm>
-          <a:prstGeom prst="rect">
-            <a:avLst/>
-          </a:prstGeom>
-          <a:noFill/>
-          <a:ln/>
-        </p:spPr>
-        <p:txBody>
-          <a:bodyPr wrap="square" lIns="0" tIns="0" rIns="0" bIns="0" rtlCol="0" anchor="t"/>
-          <a:lstStyle/>
-          <a:p>
-            <a:pPr algn="l" marL="342900" indent="-342900">
+              <a:t>Read aloud NEP 2020 §4.6.</a:t>
+            </a:r>
+            <a:pPr algn="l" indent="0" marL="0">
               <a:lnSpc>
                 <a:spcPts val="1620"/>
               </a:lnSpc>
               <a:spcAft>
                 <a:spcPts val="300"/>
               </a:spcAft>
-              <a:buSzPct val="100000"/>
-              <a:buChar char="•"/>
+              <a:buNone/>
             </a:pPr>
             <a:r>
               <a:rPr lang="en-US" sz="1200" dirty="0">
@@ -2210,12 +2531,40 @@
                 <a:ea typeface="Georgia" pitchFamily="34" charset="-122"/>
                 <a:cs typeface="Georgia" pitchFamily="34" charset="-120"/>
               </a:rPr>
-              <a:t>vidya-karana RAG cache </a:t>
-            </a:r>
+              <a:t> Discuss: what does the policy say IKS should include? What does it leave open?</a:t>
+            </a:r>
+            <a:endParaRPr lang="en-US" sz="1200" dirty="0"/>
+          </a:p>
+        </p:txBody>
+      </p:sp>
+      <p:sp>
+        <p:nvSpPr>
+          <p:cNvPr id="5" name="Text 3"/>
+          <p:cNvSpPr/>
+          <p:nvPr/>
+        </p:nvSpPr>
+        <p:spPr>
+          <a:xfrm>
+            <a:off x="406301" y="4434929"/>
+            <a:ext cx="8498026" cy="213271"/>
+          </a:xfrm>
+          <a:prstGeom prst="rect">
+            <a:avLst/>
+          </a:prstGeom>
+          <a:noFill/>
+          <a:ln/>
+        </p:spPr>
+        <p:txBody>
+          <a:bodyPr wrap="square" lIns="0" tIns="0" rIns="0" bIns="0" rtlCol="0" anchor="t"/>
+          <a:lstStyle/>
+          <a:p>
             <a:pPr algn="l" indent="0" marL="0">
               <a:lnSpc>
-                <a:spcPts val="1620"/>
-              </a:lnSpc>
+                <a:spcPts val="1680"/>
+              </a:lnSpc>
+              <a:spcBef>
+                <a:spcPts val="300"/>
+              </a:spcBef>
               <a:spcAft>
                 <a:spcPts val="300"/>
               </a:spcAft>
@@ -2230,12 +2579,150 @@
                 <a:ea typeface="Georgia" pitchFamily="34" charset="-122"/>
                 <a:cs typeface="Georgia" pitchFamily="34" charset="-120"/>
               </a:rPr>
-              <a:t>day-01-intro.json</a:t>
-            </a:r>
+              <a:t>Senior ·  · IKS Curriculum</a:t>
+            </a:r>
+            <a:endParaRPr lang="en-US" sz="1200" dirty="0"/>
+          </a:p>
+        </p:txBody>
+      </p:sp>
+    </p:spTree>
+  </p:cSld>
+  <p:clrMapOvr>
+    <a:masterClrMapping/>
+  </p:clrMapOvr>
+</p:sld>
+</file>
+
+<file path=ppt/slides/slide11.xml><?xml version="1.0" encoding="utf-8"?>
+<p:sld xmlns:a="http://schemas.openxmlformats.org/drawingml/2006/main" xmlns:r="http://schemas.openxmlformats.org/officeDocument/2006/relationships" xmlns:p="http://schemas.openxmlformats.org/presentationml/2006/main">
+  <p:cSld name="Slide 11">
+    <p:bg>
+      <p:bgPr>
+        <a:solidFill>
+          <a:srgbClr val="FAF7F2"/>
+        </a:solidFill>
+      </p:bgPr>
+    </p:bg>
+    <p:spTree>
+      <p:nvGrpSpPr>
+        <p:cNvPr id="1" name=""/>
+        <p:cNvGrpSpPr/>
+        <p:nvPr/>
+      </p:nvGrpSpPr>
+      <p:grpSpPr>
+        <a:xfrm>
+          <a:off x="0" y="0"/>
+          <a:ext cx="0" cy="0"/>
+          <a:chOff x="0" y="0"/>
+          <a:chExt cx="0" cy="0"/>
+        </a:xfrm>
+      </p:grpSpPr>
+      <p:sp>
+        <p:nvSpPr>
+          <p:cNvPr id="2" name="Text 0"/>
+          <p:cNvSpPr/>
+          <p:nvPr/>
+        </p:nvSpPr>
+        <p:spPr>
+          <a:xfrm>
+            <a:off x="0" y="0"/>
+            <a:ext cx="9144000" cy="101501"/>
+          </a:xfrm>
+          <a:prstGeom prst="rect">
+            <a:avLst/>
+          </a:prstGeom>
+          <a:solidFill>
+            <a:srgbClr val="5D1D2E"/>
+          </a:solidFill>
+          <a:ln/>
+        </p:spPr>
+        <p:txBody>
+          <a:bodyPr wrap="square" rtlCol="0" anchor="ctr"/>
+          <a:lstStyle/>
+          <a:p>
+            <a:pPr indent="0" marL="0">
+              <a:buNone/>
+            </a:pPr>
+            <a:endParaRPr lang="en-US" dirty="0"/>
+          </a:p>
+        </p:txBody>
+      </p:sp>
+      <p:sp>
+        <p:nvSpPr>
+          <p:cNvPr id="3" name="Text 1"/>
+          <p:cNvSpPr/>
+          <p:nvPr/>
+        </p:nvSpPr>
+        <p:spPr>
+          <a:xfrm>
+            <a:off x="406301" y="457051"/>
+            <a:ext cx="8498026" cy="274290"/>
+          </a:xfrm>
+          <a:prstGeom prst="rect">
+            <a:avLst/>
+          </a:prstGeom>
+          <a:noFill/>
+          <a:ln/>
+        </p:spPr>
+        <p:txBody>
+          <a:bodyPr wrap="square" lIns="0" tIns="0" rIns="0" bIns="0" rtlCol="0" anchor="t"/>
+          <a:lstStyle/>
+          <a:p>
             <a:pPr algn="l" indent="0" marL="0">
               <a:lnSpc>
-                <a:spcPts val="1620"/>
-              </a:lnSpc>
+                <a:spcPts val="2160"/>
+              </a:lnSpc>
+              <a:spcBef>
+                <a:spcPts val="600"/>
+              </a:spcBef>
+              <a:spcAft>
+                <a:spcPts val="800"/>
+              </a:spcAft>
+              <a:buNone/>
+            </a:pPr>
+            <a:r>
+              <a:rPr lang="en-US" sz="1800" b="1" dirty="0">
+                <a:solidFill>
+                  <a:srgbClr val="997929"/>
+                </a:solidFill>
+                <a:latin typeface="Times New Roman" pitchFamily="34" charset="0"/>
+                <a:ea typeface="Times New Roman" pitchFamily="34" charset="-122"/>
+                <a:cs typeface="Times New Roman" pitchFamily="34" charset="-120"/>
+              </a:rPr>
+              <a:t>Discussion (10 min)</a:t>
+            </a:r>
+            <a:endParaRPr lang="en-US" sz="1800" dirty="0"/>
+          </a:p>
+        </p:txBody>
+      </p:sp>
+      <p:sp>
+        <p:nvSpPr>
+          <p:cNvPr id="4" name="Text 2"/>
+          <p:cNvSpPr/>
+          <p:nvPr/>
+        </p:nvSpPr>
+        <p:spPr>
+          <a:xfrm>
+            <a:off x="406301" y="870942"/>
+            <a:ext cx="8498026" cy="213271"/>
+          </a:xfrm>
+          <a:prstGeom prst="rect">
+            <a:avLst/>
+          </a:prstGeom>
+          <a:noFill/>
+          <a:ln/>
+        </p:spPr>
+        <p:txBody>
+          <a:bodyPr wrap="square" lIns="0" tIns="0" rIns="0" bIns="0" rtlCol="0" anchor="t"/>
+          <a:lstStyle/>
+          <a:p>
+            <a:pPr algn="l" indent="0" marL="0">
+              <a:lnSpc>
+                <a:spcPts val="1680"/>
+              </a:lnSpc>
+              <a:spcBef>
+                <a:spcPts val="300"/>
+              </a:spcBef>
               <a:spcAft>
                 <a:spcPts val="300"/>
               </a:spcAft>
@@ -2250,6 +2737,1065 @@
                 <a:ea typeface="Georgia" pitchFamily="34" charset="-122"/>
                 <a:cs typeface="Georgia" pitchFamily="34" charset="-120"/>
               </a:rPr>
+              <a:t>Open question: </a:t>
+            </a:r>
+            <a:pPr algn="l" indent="0" marL="0">
+              <a:lnSpc>
+                <a:spcPts val="1680"/>
+              </a:lnSpc>
+              <a:spcBef>
+                <a:spcPts val="300"/>
+              </a:spcBef>
+              <a:spcAft>
+                <a:spcPts val="300"/>
+              </a:spcAft>
+              <a:buNone/>
+            </a:pPr>
+            <a:r>
+              <a:rPr lang="en-US" sz="1200" i="1" dirty="0">
+                <a:solidFill>
+                  <a:srgbClr val="1A1A1A"/>
+                </a:solidFill>
+                <a:latin typeface="Georgia" pitchFamily="34" charset="0"/>
+                <a:ea typeface="Georgia" pitchFamily="34" charset="-122"/>
+                <a:cs typeface="Georgia" pitchFamily="34" charset="-120"/>
+              </a:rPr>
+              <a:t>"Which framing would you use in your paper? Why?"</a:t>
+            </a:r>
+            <a:endParaRPr lang="en-US" sz="1200" dirty="0"/>
+          </a:p>
+        </p:txBody>
+      </p:sp>
+      <p:sp>
+        <p:nvSpPr>
+          <p:cNvPr id="5" name="Text 3"/>
+          <p:cNvSpPr/>
+          <p:nvPr/>
+        </p:nvSpPr>
+        <p:spPr>
+          <a:xfrm>
+            <a:off x="406301" y="1160413"/>
+            <a:ext cx="8498026" cy="213271"/>
+          </a:xfrm>
+          <a:prstGeom prst="rect">
+            <a:avLst/>
+          </a:prstGeom>
+          <a:noFill/>
+          <a:ln/>
+        </p:spPr>
+        <p:txBody>
+          <a:bodyPr wrap="square" lIns="0" tIns="0" rIns="0" bIns="0" rtlCol="0" anchor="t"/>
+          <a:lstStyle/>
+          <a:p>
+            <a:pPr algn="l" indent="0" marL="0">
+              <a:lnSpc>
+                <a:spcPts val="1680"/>
+              </a:lnSpc>
+              <a:spcBef>
+                <a:spcPts val="300"/>
+              </a:spcBef>
+              <a:spcAft>
+                <a:spcPts val="300"/>
+              </a:spcAft>
+              <a:buNone/>
+            </a:pPr>
+            <a:r>
+              <a:rPr lang="en-US" sz="1200" dirty="0">
+                <a:solidFill>
+                  <a:srgbClr val="1A1A1A"/>
+                </a:solidFill>
+                <a:latin typeface="Georgia" pitchFamily="34" charset="0"/>
+                <a:ea typeface="Georgia" pitchFamily="34" charset="-122"/>
+                <a:cs typeface="Georgia" pitchFamily="34" charset="-120"/>
+              </a:rPr>
+              <a:t>Take 4 student positions.</a:t>
+            </a:r>
+            <a:endParaRPr lang="en-US" sz="1200" dirty="0"/>
+          </a:p>
+        </p:txBody>
+      </p:sp>
+      <p:sp>
+        <p:nvSpPr>
+          <p:cNvPr id="6" name="Text 4"/>
+          <p:cNvSpPr/>
+          <p:nvPr/>
+        </p:nvSpPr>
+        <p:spPr>
+          <a:xfrm>
+            <a:off x="406301" y="4434929"/>
+            <a:ext cx="8498026" cy="213271"/>
+          </a:xfrm>
+          <a:prstGeom prst="rect">
+            <a:avLst/>
+          </a:prstGeom>
+          <a:noFill/>
+          <a:ln/>
+        </p:spPr>
+        <p:txBody>
+          <a:bodyPr wrap="square" lIns="0" tIns="0" rIns="0" bIns="0" rtlCol="0" anchor="t"/>
+          <a:lstStyle/>
+          <a:p>
+            <a:pPr algn="l" indent="0" marL="0">
+              <a:lnSpc>
+                <a:spcPts val="1680"/>
+              </a:lnSpc>
+              <a:spcBef>
+                <a:spcPts val="300"/>
+              </a:spcBef>
+              <a:spcAft>
+                <a:spcPts val="300"/>
+              </a:spcAft>
+              <a:buNone/>
+            </a:pPr>
+            <a:r>
+              <a:rPr lang="en-US" sz="1200" dirty="0">
+                <a:solidFill>
+                  <a:srgbClr val="1A1A1A"/>
+                </a:solidFill>
+                <a:latin typeface="Georgia" pitchFamily="34" charset="0"/>
+                <a:ea typeface="Georgia" pitchFamily="34" charset="-122"/>
+                <a:cs typeface="Georgia" pitchFamily="34" charset="-120"/>
+              </a:rPr>
+              <a:t>Senior ·  · IKS Curriculum</a:t>
+            </a:r>
+            <a:endParaRPr lang="en-US" sz="1200" dirty="0"/>
+          </a:p>
+        </p:txBody>
+      </p:sp>
+    </p:spTree>
+  </p:cSld>
+  <p:clrMapOvr>
+    <a:masterClrMapping/>
+  </p:clrMapOvr>
+</p:sld>
+</file>
+
+<file path=ppt/slides/slide12.xml><?xml version="1.0" encoding="utf-8"?>
+<p:sld xmlns:a="http://schemas.openxmlformats.org/drawingml/2006/main" xmlns:r="http://schemas.openxmlformats.org/officeDocument/2006/relationships" xmlns:p="http://schemas.openxmlformats.org/presentationml/2006/main">
+  <p:cSld name="Slide 12">
+    <p:bg>
+      <p:bgPr>
+        <a:solidFill>
+          <a:srgbClr val="FAF7F2"/>
+        </a:solidFill>
+      </p:bgPr>
+    </p:bg>
+    <p:spTree>
+      <p:nvGrpSpPr>
+        <p:cNvPr id="1" name=""/>
+        <p:cNvGrpSpPr/>
+        <p:nvPr/>
+      </p:nvGrpSpPr>
+      <p:grpSpPr>
+        <a:xfrm>
+          <a:off x="0" y="0"/>
+          <a:ext cx="0" cy="0"/>
+          <a:chOff x="0" y="0"/>
+          <a:chExt cx="0" cy="0"/>
+        </a:xfrm>
+      </p:grpSpPr>
+      <p:sp>
+        <p:nvSpPr>
+          <p:cNvPr id="2" name="Text 0"/>
+          <p:cNvSpPr/>
+          <p:nvPr/>
+        </p:nvSpPr>
+        <p:spPr>
+          <a:xfrm>
+            <a:off x="0" y="0"/>
+            <a:ext cx="9144000" cy="101501"/>
+          </a:xfrm>
+          <a:prstGeom prst="rect">
+            <a:avLst/>
+          </a:prstGeom>
+          <a:solidFill>
+            <a:srgbClr val="5D1D2E"/>
+          </a:solidFill>
+          <a:ln/>
+        </p:spPr>
+        <p:txBody>
+          <a:bodyPr wrap="square" rtlCol="0" anchor="ctr"/>
+          <a:lstStyle/>
+          <a:p>
+            <a:pPr indent="0" marL="0">
+              <a:buNone/>
+            </a:pPr>
+            <a:endParaRPr lang="en-US" dirty="0"/>
+          </a:p>
+        </p:txBody>
+      </p:sp>
+      <p:sp>
+        <p:nvSpPr>
+          <p:cNvPr id="3" name="Text 1"/>
+          <p:cNvSpPr/>
+          <p:nvPr/>
+        </p:nvSpPr>
+        <p:spPr>
+          <a:xfrm>
+            <a:off x="406301" y="457051"/>
+            <a:ext cx="8498026" cy="274290"/>
+          </a:xfrm>
+          <a:prstGeom prst="rect">
+            <a:avLst/>
+          </a:prstGeom>
+          <a:noFill/>
+          <a:ln/>
+        </p:spPr>
+        <p:txBody>
+          <a:bodyPr wrap="square" lIns="0" tIns="0" rIns="0" bIns="0" rtlCol="0" anchor="t"/>
+          <a:lstStyle/>
+          <a:p>
+            <a:pPr algn="l" indent="0" marL="0">
+              <a:lnSpc>
+                <a:spcPts val="2160"/>
+              </a:lnSpc>
+              <a:spcBef>
+                <a:spcPts val="600"/>
+              </a:spcBef>
+              <a:spcAft>
+                <a:spcPts val="800"/>
+              </a:spcAft>
+              <a:buNone/>
+            </a:pPr>
+            <a:r>
+              <a:rPr lang="en-US" sz="1800" b="1" dirty="0">
+                <a:solidFill>
+                  <a:srgbClr val="997929"/>
+                </a:solidFill>
+                <a:latin typeface="Times New Roman" pitchFamily="34" charset="0"/>
+                <a:ea typeface="Times New Roman" pitchFamily="34" charset="-122"/>
+                <a:cs typeface="Times New Roman" pitchFamily="34" charset="-120"/>
+              </a:rPr>
+              <a:t>Wrap-up (5 min)</a:t>
+            </a:r>
+            <a:endParaRPr lang="en-US" sz="1800" dirty="0"/>
+          </a:p>
+        </p:txBody>
+      </p:sp>
+      <p:sp>
+        <p:nvSpPr>
+          <p:cNvPr id="4" name="Text 2"/>
+          <p:cNvSpPr/>
+          <p:nvPr/>
+        </p:nvSpPr>
+        <p:spPr>
+          <a:xfrm>
+            <a:off x="634901" y="883593"/>
+            <a:ext cx="8102798" cy="281880"/>
+          </a:xfrm>
+          <a:prstGeom prst="rect">
+            <a:avLst/>
+          </a:prstGeom>
+          <a:noFill/>
+          <a:ln/>
+        </p:spPr>
+        <p:txBody>
+          <a:bodyPr wrap="square" lIns="0" tIns="0" rIns="0" bIns="0" rtlCol="0" anchor="t"/>
+          <a:lstStyle/>
+          <a:p>
+            <a:pPr algn="l" marL="342900" indent="-342900">
+              <a:lnSpc>
+                <a:spcPts val="1620"/>
+              </a:lnSpc>
+              <a:spcAft>
+                <a:spcPts val="300"/>
+              </a:spcAft>
+              <a:buSzPct val="100000"/>
+              <a:buChar char="•"/>
+            </a:pPr>
+            <a:r>
+              <a:rPr lang="en-US" sz="1200" dirty="0">
+                <a:solidFill>
+                  <a:srgbClr val="1A1A1A"/>
+                </a:solidFill>
+                <a:latin typeface="Georgia" pitchFamily="34" charset="0"/>
+                <a:ea typeface="Georgia" pitchFamily="34" charset="-122"/>
+                <a:cs typeface="Georgia" pitchFamily="34" charset="-120"/>
+              </a:rPr>
+              <a:t>Preview Day 2: </a:t>
+            </a:r>
+            <a:pPr algn="l" indent="0" marL="0">
+              <a:lnSpc>
+                <a:spcPts val="1620"/>
+              </a:lnSpc>
+              <a:spcAft>
+                <a:spcPts val="300"/>
+              </a:spcAft>
+              <a:buNone/>
+            </a:pPr>
+            <a:r>
+              <a:rPr lang="en-US" sz="1200" i="1" dirty="0">
+                <a:solidFill>
+                  <a:srgbClr val="1A1A1A"/>
+                </a:solidFill>
+                <a:latin typeface="Georgia" pitchFamily="34" charset="0"/>
+                <a:ea typeface="Georgia" pitchFamily="34" charset="-122"/>
+                <a:cs typeface="Georgia" pitchFamily="34" charset="-120"/>
+              </a:rPr>
+              <a:t>"Tomorrow — we read primary sources. Ṛg Veda 1.1 and Īśa Upaniṣad."</a:t>
+            </a:r>
+            <a:endParaRPr lang="en-US" sz="1200" dirty="0"/>
+          </a:p>
+        </p:txBody>
+      </p:sp>
+      <p:sp>
+        <p:nvSpPr>
+          <p:cNvPr id="5" name="Text 3"/>
+          <p:cNvSpPr/>
+          <p:nvPr/>
+        </p:nvSpPr>
+        <p:spPr>
+          <a:xfrm>
+            <a:off x="406301" y="4434929"/>
+            <a:ext cx="8498026" cy="213271"/>
+          </a:xfrm>
+          <a:prstGeom prst="rect">
+            <a:avLst/>
+          </a:prstGeom>
+          <a:noFill/>
+          <a:ln/>
+        </p:spPr>
+        <p:txBody>
+          <a:bodyPr wrap="square" lIns="0" tIns="0" rIns="0" bIns="0" rtlCol="0" anchor="t"/>
+          <a:lstStyle/>
+          <a:p>
+            <a:pPr algn="l" indent="0" marL="0">
+              <a:lnSpc>
+                <a:spcPts val="1680"/>
+              </a:lnSpc>
+              <a:spcBef>
+                <a:spcPts val="300"/>
+              </a:spcBef>
+              <a:spcAft>
+                <a:spcPts val="300"/>
+              </a:spcAft>
+              <a:buNone/>
+            </a:pPr>
+            <a:r>
+              <a:rPr lang="en-US" sz="1200" dirty="0">
+                <a:solidFill>
+                  <a:srgbClr val="1A1A1A"/>
+                </a:solidFill>
+                <a:latin typeface="Georgia" pitchFamily="34" charset="0"/>
+                <a:ea typeface="Georgia" pitchFamily="34" charset="-122"/>
+                <a:cs typeface="Georgia" pitchFamily="34" charset="-120"/>
+              </a:rPr>
+              <a:t>Senior ·  · IKS Curriculum</a:t>
+            </a:r>
+            <a:endParaRPr lang="en-US" sz="1200" dirty="0"/>
+          </a:p>
+        </p:txBody>
+      </p:sp>
+    </p:spTree>
+  </p:cSld>
+  <p:clrMapOvr>
+    <a:masterClrMapping/>
+  </p:clrMapOvr>
+</p:sld>
+</file>
+
+<file path=ppt/slides/slide13.xml><?xml version="1.0" encoding="utf-8"?>
+<p:sld xmlns:a="http://schemas.openxmlformats.org/drawingml/2006/main" xmlns:r="http://schemas.openxmlformats.org/officeDocument/2006/relationships" xmlns:p="http://schemas.openxmlformats.org/presentationml/2006/main">
+  <p:cSld name="Slide 13">
+    <p:bg>
+      <p:bgPr>
+        <a:solidFill>
+          <a:srgbClr val="FAF7F2"/>
+        </a:solidFill>
+      </p:bgPr>
+    </p:bg>
+    <p:spTree>
+      <p:nvGrpSpPr>
+        <p:cNvPr id="1" name=""/>
+        <p:cNvGrpSpPr/>
+        <p:nvPr/>
+      </p:nvGrpSpPr>
+      <p:grpSpPr>
+        <a:xfrm>
+          <a:off x="0" y="0"/>
+          <a:ext cx="0" cy="0"/>
+          <a:chOff x="0" y="0"/>
+          <a:chExt cx="0" cy="0"/>
+        </a:xfrm>
+      </p:grpSpPr>
+      <p:sp>
+        <p:nvSpPr>
+          <p:cNvPr id="2" name="Text 0"/>
+          <p:cNvSpPr/>
+          <p:nvPr/>
+        </p:nvSpPr>
+        <p:spPr>
+          <a:xfrm>
+            <a:off x="0" y="0"/>
+            <a:ext cx="9144000" cy="101501"/>
+          </a:xfrm>
+          <a:prstGeom prst="rect">
+            <a:avLst/>
+          </a:prstGeom>
+          <a:solidFill>
+            <a:srgbClr val="5D1D2E"/>
+          </a:solidFill>
+          <a:ln/>
+        </p:spPr>
+        <p:txBody>
+          <a:bodyPr wrap="square" rtlCol="0" anchor="ctr"/>
+          <a:lstStyle/>
+          <a:p>
+            <a:pPr indent="0" marL="0">
+              <a:buNone/>
+            </a:pPr>
+            <a:endParaRPr lang="en-US" dirty="0"/>
+          </a:p>
+        </p:txBody>
+      </p:sp>
+      <p:sp>
+        <p:nvSpPr>
+          <p:cNvPr id="3" name="Text 1"/>
+          <p:cNvSpPr/>
+          <p:nvPr/>
+        </p:nvSpPr>
+        <p:spPr>
+          <a:xfrm>
+            <a:off x="406301" y="457051"/>
+            <a:ext cx="8498026" cy="274290"/>
+          </a:xfrm>
+          <a:prstGeom prst="rect">
+            <a:avLst/>
+          </a:prstGeom>
+          <a:noFill/>
+          <a:ln/>
+        </p:spPr>
+        <p:txBody>
+          <a:bodyPr wrap="square" lIns="0" tIns="0" rIns="0" bIns="0" rtlCol="0" anchor="t"/>
+          <a:lstStyle/>
+          <a:p>
+            <a:pPr algn="l" indent="0" marL="0">
+              <a:lnSpc>
+                <a:spcPts val="2160"/>
+              </a:lnSpc>
+              <a:spcBef>
+                <a:spcPts val="600"/>
+              </a:spcBef>
+              <a:spcAft>
+                <a:spcPts val="800"/>
+              </a:spcAft>
+              <a:buNone/>
+            </a:pPr>
+            <a:r>
+              <a:rPr lang="en-US" sz="1800" b="1" dirty="0">
+                <a:solidFill>
+                  <a:srgbClr val="997929"/>
+                </a:solidFill>
+                <a:latin typeface="Times New Roman" pitchFamily="34" charset="0"/>
+                <a:ea typeface="Times New Roman" pitchFamily="34" charset="-122"/>
+                <a:cs typeface="Times New Roman" pitchFamily="34" charset="-120"/>
+              </a:rPr>
+              <a:t>Differentiation</a:t>
+            </a:r>
+            <a:endParaRPr lang="en-US" sz="1800" dirty="0"/>
+          </a:p>
+        </p:txBody>
+      </p:sp>
+      <p:sp>
+        <p:nvSpPr>
+          <p:cNvPr id="4" name="Text 2"/>
+          <p:cNvSpPr/>
+          <p:nvPr/>
+        </p:nvSpPr>
+        <p:spPr>
+          <a:xfrm>
+            <a:off x="634901" y="883593"/>
+            <a:ext cx="8102798" cy="525661"/>
+          </a:xfrm>
+          <a:prstGeom prst="rect">
+            <a:avLst/>
+          </a:prstGeom>
+          <a:noFill/>
+          <a:ln/>
+        </p:spPr>
+        <p:txBody>
+          <a:bodyPr wrap="square" lIns="0" tIns="0" rIns="0" bIns="0" rtlCol="0" anchor="t"/>
+          <a:lstStyle/>
+          <a:p>
+            <a:pPr algn="l" marL="342900" indent="-342900">
+              <a:lnSpc>
+                <a:spcPts val="1620"/>
+              </a:lnSpc>
+              <a:spcAft>
+                <a:spcPts val="300"/>
+              </a:spcAft>
+              <a:buSzPct val="100000"/>
+              <a:buChar char="•"/>
+            </a:pPr>
+            <a:r>
+              <a:rPr lang="en-US" sz="1200" b="1" dirty="0">
+                <a:solidFill>
+                  <a:srgbClr val="1A1A1A"/>
+                </a:solidFill>
+                <a:latin typeface="Georgia" pitchFamily="34" charset="0"/>
+                <a:ea typeface="Georgia" pitchFamily="34" charset="-122"/>
+                <a:cs typeface="Georgia" pitchFamily="34" charset="-120"/>
+              </a:rPr>
+              <a:t>Tier up:</a:t>
+            </a:r>
+            <a:pPr algn="l" indent="0" marL="0">
+              <a:lnSpc>
+                <a:spcPts val="1620"/>
+              </a:lnSpc>
+              <a:spcAft>
+                <a:spcPts val="300"/>
+              </a:spcAft>
+              <a:buNone/>
+            </a:pPr>
+            <a:r>
+              <a:rPr lang="en-US" sz="1200" dirty="0">
+                <a:solidFill>
+                  <a:srgbClr val="1A1A1A"/>
+                </a:solidFill>
+                <a:latin typeface="Georgia" pitchFamily="34" charset="0"/>
+                <a:ea typeface="Georgia" pitchFamily="34" charset="-122"/>
+                <a:cs typeface="Georgia" pitchFamily="34" charset="-120"/>
+              </a:rPr>
+              <a:t> Read Pollock (2006) ch. 1 on Sanskrit as cosmopolitan language.</a:t>
+            </a:r>
+            <a:endParaRPr lang="en-US" sz="1200" dirty="0"/>
+          </a:p>
+          <a:p>
+            <a:pPr algn="l" marL="342900" indent="-342900">
+              <a:lnSpc>
+                <a:spcPts val="1620"/>
+              </a:lnSpc>
+              <a:spcAft>
+                <a:spcPts val="300"/>
+              </a:spcAft>
+              <a:buSzPct val="100000"/>
+              <a:buChar char="•"/>
+            </a:pPr>
+            <a:r>
+              <a:rPr lang="en-US" sz="1200" b="1" dirty="0">
+                <a:solidFill>
+                  <a:srgbClr val="1A1A1A"/>
+                </a:solidFill>
+                <a:latin typeface="Georgia" pitchFamily="34" charset="0"/>
+                <a:ea typeface="Georgia" pitchFamily="34" charset="-122"/>
+                <a:cs typeface="Georgia" pitchFamily="34" charset="-120"/>
+              </a:rPr>
+              <a:t>Tier down:</a:t>
+            </a:r>
+            <a:pPr algn="l" indent="0" marL="0">
+              <a:lnSpc>
+                <a:spcPts val="1620"/>
+              </a:lnSpc>
+              <a:spcAft>
+                <a:spcPts val="300"/>
+              </a:spcAft>
+              <a:buNone/>
+            </a:pPr>
+            <a:r>
+              <a:rPr lang="en-US" sz="1200" dirty="0">
+                <a:solidFill>
+                  <a:srgbClr val="1A1A1A"/>
+                </a:solidFill>
+                <a:latin typeface="Georgia" pitchFamily="34" charset="0"/>
+                <a:ea typeface="Georgia" pitchFamily="34" charset="-122"/>
+                <a:cs typeface="Georgia" pitchFamily="34" charset="-120"/>
+              </a:rPr>
+              <a:t> Focus on the three framings; don't worry about the policy text yet.</a:t>
+            </a:r>
+            <a:endParaRPr lang="en-US" sz="1200" dirty="0"/>
+          </a:p>
+        </p:txBody>
+      </p:sp>
+      <p:sp>
+        <p:nvSpPr>
+          <p:cNvPr id="5" name="Text 3"/>
+          <p:cNvSpPr/>
+          <p:nvPr/>
+        </p:nvSpPr>
+        <p:spPr>
+          <a:xfrm>
+            <a:off x="406301" y="4434929"/>
+            <a:ext cx="8498026" cy="213271"/>
+          </a:xfrm>
+          <a:prstGeom prst="rect">
+            <a:avLst/>
+          </a:prstGeom>
+          <a:noFill/>
+          <a:ln/>
+        </p:spPr>
+        <p:txBody>
+          <a:bodyPr wrap="square" lIns="0" tIns="0" rIns="0" bIns="0" rtlCol="0" anchor="t"/>
+          <a:lstStyle/>
+          <a:p>
+            <a:pPr algn="l" indent="0" marL="0">
+              <a:lnSpc>
+                <a:spcPts val="1680"/>
+              </a:lnSpc>
+              <a:spcBef>
+                <a:spcPts val="300"/>
+              </a:spcBef>
+              <a:spcAft>
+                <a:spcPts val="300"/>
+              </a:spcAft>
+              <a:buNone/>
+            </a:pPr>
+            <a:r>
+              <a:rPr lang="en-US" sz="1200" dirty="0">
+                <a:solidFill>
+                  <a:srgbClr val="1A1A1A"/>
+                </a:solidFill>
+                <a:latin typeface="Georgia" pitchFamily="34" charset="0"/>
+                <a:ea typeface="Georgia" pitchFamily="34" charset="-122"/>
+                <a:cs typeface="Georgia" pitchFamily="34" charset="-120"/>
+              </a:rPr>
+              <a:t>Senior ·  · IKS Curriculum</a:t>
+            </a:r>
+            <a:endParaRPr lang="en-US" sz="1200" dirty="0"/>
+          </a:p>
+        </p:txBody>
+      </p:sp>
+    </p:spTree>
+  </p:cSld>
+  <p:clrMapOvr>
+    <a:masterClrMapping/>
+  </p:clrMapOvr>
+</p:sld>
+</file>
+
+<file path=ppt/slides/slide14.xml><?xml version="1.0" encoding="utf-8"?>
+<p:sld xmlns:a="http://schemas.openxmlformats.org/drawingml/2006/main" xmlns:r="http://schemas.openxmlformats.org/officeDocument/2006/relationships" xmlns:p="http://schemas.openxmlformats.org/presentationml/2006/main">
+  <p:cSld name="Slide 14">
+    <p:bg>
+      <p:bgPr>
+        <a:solidFill>
+          <a:srgbClr val="FAF7F2"/>
+        </a:solidFill>
+      </p:bgPr>
+    </p:bg>
+    <p:spTree>
+      <p:nvGrpSpPr>
+        <p:cNvPr id="1" name=""/>
+        <p:cNvGrpSpPr/>
+        <p:nvPr/>
+      </p:nvGrpSpPr>
+      <p:grpSpPr>
+        <a:xfrm>
+          <a:off x="0" y="0"/>
+          <a:ext cx="0" cy="0"/>
+          <a:chOff x="0" y="0"/>
+          <a:chExt cx="0" cy="0"/>
+        </a:xfrm>
+      </p:grpSpPr>
+      <p:sp>
+        <p:nvSpPr>
+          <p:cNvPr id="2" name="Text 0"/>
+          <p:cNvSpPr/>
+          <p:nvPr/>
+        </p:nvSpPr>
+        <p:spPr>
+          <a:xfrm>
+            <a:off x="0" y="0"/>
+            <a:ext cx="9144000" cy="101501"/>
+          </a:xfrm>
+          <a:prstGeom prst="rect">
+            <a:avLst/>
+          </a:prstGeom>
+          <a:solidFill>
+            <a:srgbClr val="5D1D2E"/>
+          </a:solidFill>
+          <a:ln/>
+        </p:spPr>
+        <p:txBody>
+          <a:bodyPr wrap="square" rtlCol="0" anchor="ctr"/>
+          <a:lstStyle/>
+          <a:p>
+            <a:pPr indent="0" marL="0">
+              <a:buNone/>
+            </a:pPr>
+            <a:endParaRPr lang="en-US" dirty="0"/>
+          </a:p>
+        </p:txBody>
+      </p:sp>
+      <p:sp>
+        <p:nvSpPr>
+          <p:cNvPr id="3" name="Text 1"/>
+          <p:cNvSpPr/>
+          <p:nvPr/>
+        </p:nvSpPr>
+        <p:spPr>
+          <a:xfrm>
+            <a:off x="406301" y="457051"/>
+            <a:ext cx="8498026" cy="274290"/>
+          </a:xfrm>
+          <a:prstGeom prst="rect">
+            <a:avLst/>
+          </a:prstGeom>
+          <a:noFill/>
+          <a:ln/>
+        </p:spPr>
+        <p:txBody>
+          <a:bodyPr wrap="square" lIns="0" tIns="0" rIns="0" bIns="0" rtlCol="0" anchor="t"/>
+          <a:lstStyle/>
+          <a:p>
+            <a:pPr algn="l" indent="0" marL="0">
+              <a:lnSpc>
+                <a:spcPts val="2160"/>
+              </a:lnSpc>
+              <a:spcBef>
+                <a:spcPts val="600"/>
+              </a:spcBef>
+              <a:spcAft>
+                <a:spcPts val="800"/>
+              </a:spcAft>
+              <a:buNone/>
+            </a:pPr>
+            <a:r>
+              <a:rPr lang="en-US" sz="1800" b="1" dirty="0">
+                <a:solidFill>
+                  <a:srgbClr val="997929"/>
+                </a:solidFill>
+                <a:latin typeface="Times New Roman" pitchFamily="34" charset="0"/>
+                <a:ea typeface="Times New Roman" pitchFamily="34" charset="-122"/>
+                <a:cs typeface="Times New Roman" pitchFamily="34" charset="-120"/>
+              </a:rPr>
+              <a:t>Teacher notes</a:t>
+            </a:r>
+            <a:endParaRPr lang="en-US" sz="1800" dirty="0"/>
+          </a:p>
+        </p:txBody>
+      </p:sp>
+      <p:sp>
+        <p:nvSpPr>
+          <p:cNvPr id="4" name="Text 2"/>
+          <p:cNvSpPr/>
+          <p:nvPr/>
+        </p:nvSpPr>
+        <p:spPr>
+          <a:xfrm>
+            <a:off x="634901" y="883593"/>
+            <a:ext cx="8102798" cy="731341"/>
+          </a:xfrm>
+          <a:prstGeom prst="rect">
+            <a:avLst/>
+          </a:prstGeom>
+          <a:noFill/>
+          <a:ln/>
+        </p:spPr>
+        <p:txBody>
+          <a:bodyPr wrap="square" lIns="0" tIns="0" rIns="0" bIns="0" rtlCol="0" anchor="t"/>
+          <a:lstStyle/>
+          <a:p>
+            <a:pPr algn="l" marL="342900" indent="-342900">
+              <a:lnSpc>
+                <a:spcPts val="1620"/>
+              </a:lnSpc>
+              <a:spcAft>
+                <a:spcPts val="300"/>
+              </a:spcAft>
+              <a:buSzPct val="100000"/>
+              <a:buChar char="•"/>
+            </a:pPr>
+            <a:r>
+              <a:rPr lang="en-US" sz="1200" dirty="0">
+                <a:solidFill>
+                  <a:srgbClr val="1A1A1A"/>
+                </a:solidFill>
+                <a:latin typeface="Georgia" pitchFamily="34" charset="0"/>
+                <a:ea typeface="Georgia" pitchFamily="34" charset="-122"/>
+                <a:cs typeface="Georgia" pitchFamily="34" charset="-120"/>
+              </a:rPr>
+              <a:t>Some students will immediately want to "defend Indian culture" against perceived critique. Reframe: precise definition IS defending it. Imprecise defence weakens.</a:t>
+            </a:r>
+            <a:endParaRPr lang="en-US" sz="1200" dirty="0"/>
+          </a:p>
+          <a:p>
+            <a:pPr algn="l" marL="342900" indent="-342900">
+              <a:lnSpc>
+                <a:spcPts val="1620"/>
+              </a:lnSpc>
+              <a:spcAft>
+                <a:spcPts val="300"/>
+              </a:spcAft>
+              <a:buSzPct val="100000"/>
+              <a:buChar char="•"/>
+            </a:pPr>
+            <a:r>
+              <a:rPr lang="en-US" sz="1200" dirty="0">
+                <a:solidFill>
+                  <a:srgbClr val="1A1A1A"/>
+                </a:solidFill>
+                <a:latin typeface="Georgia" pitchFamily="34" charset="0"/>
+                <a:ea typeface="Georgia" pitchFamily="34" charset="-122"/>
+                <a:cs typeface="Georgia" pitchFamily="34" charset="-120"/>
+              </a:rPr>
+              <a:t>Some will want to dismiss the whole module as "Hindu nationalism." Push: scholarly framing exists; engage it.</a:t>
+            </a:r>
+            <a:endParaRPr lang="en-US" sz="1200" dirty="0"/>
+          </a:p>
+        </p:txBody>
+      </p:sp>
+      <p:sp>
+        <p:nvSpPr>
+          <p:cNvPr id="5" name="Text 3"/>
+          <p:cNvSpPr/>
+          <p:nvPr/>
+        </p:nvSpPr>
+        <p:spPr>
+          <a:xfrm>
+            <a:off x="406301" y="4434929"/>
+            <a:ext cx="8498026" cy="213271"/>
+          </a:xfrm>
+          <a:prstGeom prst="rect">
+            <a:avLst/>
+          </a:prstGeom>
+          <a:noFill/>
+          <a:ln/>
+        </p:spPr>
+        <p:txBody>
+          <a:bodyPr wrap="square" lIns="0" tIns="0" rIns="0" bIns="0" rtlCol="0" anchor="t"/>
+          <a:lstStyle/>
+          <a:p>
+            <a:pPr algn="l" indent="0" marL="0">
+              <a:lnSpc>
+                <a:spcPts val="1680"/>
+              </a:lnSpc>
+              <a:spcBef>
+                <a:spcPts val="300"/>
+              </a:spcBef>
+              <a:spcAft>
+                <a:spcPts val="300"/>
+              </a:spcAft>
+              <a:buNone/>
+            </a:pPr>
+            <a:r>
+              <a:rPr lang="en-US" sz="1200" dirty="0">
+                <a:solidFill>
+                  <a:srgbClr val="1A1A1A"/>
+                </a:solidFill>
+                <a:latin typeface="Georgia" pitchFamily="34" charset="0"/>
+                <a:ea typeface="Georgia" pitchFamily="34" charset="-122"/>
+                <a:cs typeface="Georgia" pitchFamily="34" charset="-120"/>
+              </a:rPr>
+              <a:t>Senior ·  · IKS Curriculum</a:t>
+            </a:r>
+            <a:endParaRPr lang="en-US" sz="1200" dirty="0"/>
+          </a:p>
+        </p:txBody>
+      </p:sp>
+    </p:spTree>
+  </p:cSld>
+  <p:clrMapOvr>
+    <a:masterClrMapping/>
+  </p:clrMapOvr>
+</p:sld>
+</file>
+
+<file path=ppt/slides/slide15.xml><?xml version="1.0" encoding="utf-8"?>
+<p:sld xmlns:a="http://schemas.openxmlformats.org/drawingml/2006/main" xmlns:r="http://schemas.openxmlformats.org/officeDocument/2006/relationships" xmlns:p="http://schemas.openxmlformats.org/presentationml/2006/main">
+  <p:cSld name="Slide 15">
+    <p:bg>
+      <p:bgPr>
+        <a:solidFill>
+          <a:srgbClr val="FAF7F2"/>
+        </a:solidFill>
+      </p:bgPr>
+    </p:bg>
+    <p:spTree>
+      <p:nvGrpSpPr>
+        <p:cNvPr id="1" name=""/>
+        <p:cNvGrpSpPr/>
+        <p:nvPr/>
+      </p:nvGrpSpPr>
+      <p:grpSpPr>
+        <a:xfrm>
+          <a:off x="0" y="0"/>
+          <a:ext cx="0" cy="0"/>
+          <a:chOff x="0" y="0"/>
+          <a:chExt cx="0" cy="0"/>
+        </a:xfrm>
+      </p:grpSpPr>
+      <p:sp>
+        <p:nvSpPr>
+          <p:cNvPr id="2" name="Text 0"/>
+          <p:cNvSpPr/>
+          <p:nvPr/>
+        </p:nvSpPr>
+        <p:spPr>
+          <a:xfrm>
+            <a:off x="0" y="0"/>
+            <a:ext cx="9144000" cy="101501"/>
+          </a:xfrm>
+          <a:prstGeom prst="rect">
+            <a:avLst/>
+          </a:prstGeom>
+          <a:solidFill>
+            <a:srgbClr val="5D1D2E"/>
+          </a:solidFill>
+          <a:ln/>
+        </p:spPr>
+        <p:txBody>
+          <a:bodyPr wrap="square" rtlCol="0" anchor="ctr"/>
+          <a:lstStyle/>
+          <a:p>
+            <a:pPr indent="0" marL="0">
+              <a:buNone/>
+            </a:pPr>
+            <a:endParaRPr lang="en-US" dirty="0"/>
+          </a:p>
+        </p:txBody>
+      </p:sp>
+      <p:sp>
+        <p:nvSpPr>
+          <p:cNvPr id="3" name="Text 1"/>
+          <p:cNvSpPr/>
+          <p:nvPr/>
+        </p:nvSpPr>
+        <p:spPr>
+          <a:xfrm>
+            <a:off x="406301" y="457051"/>
+            <a:ext cx="8498026" cy="274290"/>
+          </a:xfrm>
+          <a:prstGeom prst="rect">
+            <a:avLst/>
+          </a:prstGeom>
+          <a:noFill/>
+          <a:ln/>
+        </p:spPr>
+        <p:txBody>
+          <a:bodyPr wrap="square" lIns="0" tIns="0" rIns="0" bIns="0" rtlCol="0" anchor="t"/>
+          <a:lstStyle/>
+          <a:p>
+            <a:pPr algn="l" indent="0" marL="0">
+              <a:lnSpc>
+                <a:spcPts val="2160"/>
+              </a:lnSpc>
+              <a:spcBef>
+                <a:spcPts val="600"/>
+              </a:spcBef>
+              <a:spcAft>
+                <a:spcPts val="800"/>
+              </a:spcAft>
+              <a:buNone/>
+            </a:pPr>
+            <a:r>
+              <a:rPr lang="en-US" sz="1800" b="1" dirty="0">
+                <a:solidFill>
+                  <a:srgbClr val="997929"/>
+                </a:solidFill>
+                <a:latin typeface="Times New Roman" pitchFamily="34" charset="0"/>
+                <a:ea typeface="Times New Roman" pitchFamily="34" charset="-122"/>
+                <a:cs typeface="Times New Roman" pitchFamily="34" charset="-120"/>
+              </a:rPr>
+              <a:t>Citation(s) used</a:t>
+            </a:r>
+            <a:endParaRPr lang="en-US" sz="1800" dirty="0"/>
+          </a:p>
+        </p:txBody>
+      </p:sp>
+      <p:sp>
+        <p:nvSpPr>
+          <p:cNvPr id="4" name="Text 2"/>
+          <p:cNvSpPr/>
+          <p:nvPr/>
+        </p:nvSpPr>
+        <p:spPr>
+          <a:xfrm>
+            <a:off x="634901" y="883593"/>
+            <a:ext cx="8102798" cy="544711"/>
+          </a:xfrm>
+          <a:prstGeom prst="rect">
+            <a:avLst/>
+          </a:prstGeom>
+          <a:noFill/>
+          <a:ln/>
+        </p:spPr>
+        <p:txBody>
+          <a:bodyPr wrap="square" lIns="0" tIns="0" rIns="0" bIns="0" rtlCol="0" anchor="t"/>
+          <a:lstStyle/>
+          <a:p>
+            <a:pPr algn="l" marL="342900" indent="-342900">
+              <a:lnSpc>
+                <a:spcPts val="1620"/>
+              </a:lnSpc>
+              <a:spcAft>
+                <a:spcPts val="300"/>
+              </a:spcAft>
+              <a:buSzPct val="100000"/>
+              <a:buChar char="•"/>
+            </a:pPr>
+            <a:r>
+              <a:rPr lang="en-US" sz="1200" dirty="0">
+                <a:solidFill>
+                  <a:srgbClr val="1A1A1A"/>
+                </a:solidFill>
+                <a:latin typeface="Georgia" pitchFamily="34" charset="0"/>
+                <a:ea typeface="Georgia" pitchFamily="34" charset="-122"/>
+                <a:cs typeface="Georgia" pitchFamily="34" charset="-120"/>
+              </a:rPr>
+              <a:t>Government of India (2020). NEP 2020 §4.6.</a:t>
+            </a:r>
+            <a:endParaRPr lang="en-US" sz="1200" dirty="0"/>
+          </a:p>
+          <a:p>
+            <a:pPr algn="l" marL="342900" indent="-342900">
+              <a:lnSpc>
+                <a:spcPts val="1620"/>
+              </a:lnSpc>
+              <a:spcAft>
+                <a:spcPts val="300"/>
+              </a:spcAft>
+              <a:buSzPct val="100000"/>
+              <a:buChar char="•"/>
+            </a:pPr>
+            <a:r>
+              <a:rPr lang="en-US" sz="1200" dirty="0">
+                <a:solidFill>
+                  <a:srgbClr val="1A1A1A"/>
+                </a:solidFill>
+                <a:latin typeface="Georgia" pitchFamily="34" charset="0"/>
+                <a:ea typeface="Georgia" pitchFamily="34" charset="-122"/>
+                <a:cs typeface="Georgia" pitchFamily="34" charset="-120"/>
+              </a:rPr>
+              <a:t>vidya-karana RAG cache </a:t>
+            </a:r>
+            <a:pPr algn="l" indent="0" marL="0">
+              <a:lnSpc>
+                <a:spcPts val="1620"/>
+              </a:lnSpc>
+              <a:spcAft>
+                <a:spcPts val="300"/>
+              </a:spcAft>
+              <a:buNone/>
+            </a:pPr>
+            <a:r>
+              <a:rPr lang="en-US" sz="1200" dirty="0">
+                <a:solidFill>
+                  <a:srgbClr val="1A1A1A"/>
+                </a:solidFill>
+                <a:latin typeface="Georgia" pitchFamily="34" charset="0"/>
+                <a:ea typeface="Georgia" pitchFamily="34" charset="-122"/>
+                <a:cs typeface="Georgia" pitchFamily="34" charset="-120"/>
+              </a:rPr>
+              <a:t>day-01-intro.json</a:t>
+            </a:r>
+            <a:pPr algn="l" indent="0" marL="0">
+              <a:lnSpc>
+                <a:spcPts val="1620"/>
+              </a:lnSpc>
+              <a:spcAft>
+                <a:spcPts val="300"/>
+              </a:spcAft>
+              <a:buNone/>
+            </a:pPr>
+            <a:r>
+              <a:rPr lang="en-US" sz="1200" dirty="0">
+                <a:solidFill>
+                  <a:srgbClr val="1A1A1A"/>
+                </a:solidFill>
+                <a:latin typeface="Georgia" pitchFamily="34" charset="0"/>
+                <a:ea typeface="Georgia" pitchFamily="34" charset="-122"/>
+                <a:cs typeface="Georgia" pitchFamily="34" charset="-120"/>
+              </a:rPr>
               <a:t> for background.</a:t>
             </a:r>
             <a:endParaRPr lang="en-US" sz="1200" dirty="0"/>
@@ -2258,7 +3804,7 @@
       </p:sp>
       <p:sp>
         <p:nvSpPr>
-          <p:cNvPr id="6" name="Text 4"/>
+          <p:cNvPr id="5" name="Text 3"/>
           <p:cNvSpPr/>
           <p:nvPr/>
         </p:nvSpPr>
@@ -2408,7 +3954,7 @@
                 <a:ea typeface="Times New Roman" pitchFamily="34" charset="-122"/>
                 <a:cs typeface="Times New Roman" pitchFamily="34" charset="-120"/>
               </a:rPr>
-              <a:t>Materials</a:t>
+              <a:t>Learning objective</a:t>
             </a:r>
             <a:endParaRPr lang="en-US" sz="1800" dirty="0"/>
           </a:p>
@@ -2423,7 +3969,7 @@
         <p:spPr>
           <a:xfrm>
             <a:off x="406301" y="870942"/>
-            <a:ext cx="8498026" cy="213271"/>
+            <a:ext cx="8498026" cy="426541"/>
           </a:xfrm>
           <a:prstGeom prst="rect">
             <a:avLst/>
@@ -2456,7 +4002,7 @@
                 <a:ea typeface="Georgia" pitchFamily="34" charset="-122"/>
                 <a:cs typeface="Georgia" pitchFamily="34" charset="-120"/>
               </a:rPr>
-              <a:t>– NEP 2020 §4.6 printed extract – Whiteboard</a:t>
+              <a:t>Students engage the boundary problem — what "IKS" denotes, what it doesn't, and why the label itself is a recent construction.</a:t>
             </a:r>
             <a:endParaRPr lang="en-US" sz="1200" dirty="0"/>
           </a:p>
@@ -2614,7 +4160,7 @@
                 <a:ea typeface="Times New Roman" pitchFamily="34" charset="-122"/>
                 <a:cs typeface="Times New Roman" pitchFamily="34" charset="-120"/>
               </a:rPr>
-              <a:t>Flow</a:t>
+              <a:t>Materials</a:t>
             </a:r>
             <a:endParaRPr lang="en-US" sz="1800" dirty="0"/>
           </a:p>
@@ -2623,6 +4169,76 @@
       <p:sp>
         <p:nvSpPr>
           <p:cNvPr id="4" name="Text 2"/>
+          <p:cNvSpPr/>
+          <p:nvPr/>
+        </p:nvSpPr>
+        <p:spPr>
+          <a:xfrm>
+            <a:off x="634901" y="883593"/>
+            <a:ext cx="8102798" cy="525661"/>
+          </a:xfrm>
+          <a:prstGeom prst="rect">
+            <a:avLst/>
+          </a:prstGeom>
+          <a:noFill/>
+          <a:ln/>
+        </p:spPr>
+        <p:txBody>
+          <a:bodyPr wrap="square" lIns="0" tIns="0" rIns="0" bIns="0" rtlCol="0" anchor="t"/>
+          <a:lstStyle/>
+          <a:p>
+            <a:pPr algn="l" marL="342900" indent="-342900">
+              <a:lnSpc>
+                <a:spcPts val="1620"/>
+              </a:lnSpc>
+              <a:spcAft>
+                <a:spcPts val="300"/>
+              </a:spcAft>
+              <a:buSzPct val="100000"/>
+              <a:buChar char="•"/>
+            </a:pPr>
+            <a:r>
+              <a:rPr lang="en-US" sz="1200" dirty="0">
+                <a:solidFill>
+                  <a:srgbClr val="1A1A1A"/>
+                </a:solidFill>
+                <a:latin typeface="Georgia" pitchFamily="34" charset="0"/>
+                <a:ea typeface="Georgia" pitchFamily="34" charset="-122"/>
+                <a:cs typeface="Georgia" pitchFamily="34" charset="-120"/>
+              </a:rPr>
+              <a:t>NEP 2020 §4.6 printed extract</a:t>
+            </a:r>
+            <a:endParaRPr lang="en-US" sz="1200" dirty="0"/>
+          </a:p>
+          <a:p>
+            <a:pPr algn="l" marL="342900" indent="-342900">
+              <a:lnSpc>
+                <a:spcPts val="1620"/>
+              </a:lnSpc>
+              <a:spcAft>
+                <a:spcPts val="300"/>
+              </a:spcAft>
+              <a:buSzPct val="100000"/>
+              <a:buChar char="•"/>
+            </a:pPr>
+            <a:r>
+              <a:rPr lang="en-US" sz="1200" dirty="0">
+                <a:solidFill>
+                  <a:srgbClr val="1A1A1A"/>
+                </a:solidFill>
+                <a:latin typeface="Georgia" pitchFamily="34" charset="0"/>
+                <a:ea typeface="Georgia" pitchFamily="34" charset="-122"/>
+                <a:cs typeface="Georgia" pitchFamily="34" charset="-120"/>
+              </a:rPr>
+              <a:t>Whiteboard</a:t>
+            </a:r>
+            <a:endParaRPr lang="en-US" sz="1200" dirty="0"/>
+          </a:p>
+        </p:txBody>
+      </p:sp>
+      <p:sp>
+        <p:nvSpPr>
+          <p:cNvPr id="5" name="Text 3"/>
           <p:cNvSpPr/>
           <p:nvPr/>
         </p:nvSpPr>
@@ -2772,7 +4388,7 @@
                 <a:ea typeface="Times New Roman" pitchFamily="34" charset="-122"/>
                 <a:cs typeface="Times New Roman" pitchFamily="34" charset="-120"/>
               </a:rPr>
-              <a:t>Warm-up (5 min)</a:t>
+              <a:t>Flow</a:t>
             </a:r>
             <a:endParaRPr lang="en-US" sz="1800" dirty="0"/>
           </a:p>
@@ -2781,125 +4397,6 @@
       <p:sp>
         <p:nvSpPr>
           <p:cNvPr id="4" name="Text 2"/>
-          <p:cNvSpPr/>
-          <p:nvPr/>
-        </p:nvSpPr>
-        <p:spPr>
-          <a:xfrm>
-            <a:off x="406301" y="870942"/>
-            <a:ext cx="8498026" cy="213271"/>
-          </a:xfrm>
-          <a:prstGeom prst="rect">
-            <a:avLst/>
-          </a:prstGeom>
-          <a:noFill/>
-          <a:ln/>
-        </p:spPr>
-        <p:txBody>
-          <a:bodyPr wrap="square" lIns="0" tIns="0" rIns="0" bIns="0" rtlCol="0" anchor="t"/>
-          <a:lstStyle/>
-          <a:p>
-            <a:pPr algn="l" indent="0" marL="0">
-              <a:lnSpc>
-                <a:spcPts val="1680"/>
-              </a:lnSpc>
-              <a:spcBef>
-                <a:spcPts val="300"/>
-              </a:spcBef>
-              <a:spcAft>
-                <a:spcPts val="300"/>
-              </a:spcAft>
-              <a:buNone/>
-            </a:pPr>
-            <a:r>
-              <a:rPr lang="en-US" sz="1200" dirty="0">
-                <a:solidFill>
-                  <a:srgbClr val="1A1A1A"/>
-                </a:solidFill>
-                <a:latin typeface="Georgia" pitchFamily="34" charset="0"/>
-                <a:ea typeface="Georgia" pitchFamily="34" charset="-122"/>
-                <a:cs typeface="Georgia" pitchFamily="34" charset="-120"/>
-              </a:rPr>
-              <a:t>Provocation: </a:t>
-            </a:r>
-            <a:pPr algn="l" indent="0" marL="0">
-              <a:lnSpc>
-                <a:spcPts val="1680"/>
-              </a:lnSpc>
-              <a:spcBef>
-                <a:spcPts val="300"/>
-              </a:spcBef>
-              <a:spcAft>
-                <a:spcPts val="300"/>
-              </a:spcAft>
-              <a:buNone/>
-            </a:pPr>
-            <a:r>
-              <a:rPr lang="en-US" sz="1200" i="1" dirty="0">
-                <a:solidFill>
-                  <a:srgbClr val="1A1A1A"/>
-                </a:solidFill>
-                <a:latin typeface="Georgia" pitchFamily="34" charset="0"/>
-                <a:ea typeface="Georgia" pitchFamily="34" charset="-122"/>
-                <a:cs typeface="Georgia" pitchFamily="34" charset="-120"/>
-              </a:rPr>
-              <a:t>"'Indian Knowledge Systems' — is that a coherent category, or a political slogan?"</a:t>
-            </a:r>
-            <a:endParaRPr lang="en-US" sz="1200" dirty="0"/>
-          </a:p>
-        </p:txBody>
-      </p:sp>
-      <p:sp>
-        <p:nvSpPr>
-          <p:cNvPr id="5" name="Text 3"/>
-          <p:cNvSpPr/>
-          <p:nvPr/>
-        </p:nvSpPr>
-        <p:spPr>
-          <a:xfrm>
-            <a:off x="406301" y="1160413"/>
-            <a:ext cx="8498026" cy="213271"/>
-          </a:xfrm>
-          <a:prstGeom prst="rect">
-            <a:avLst/>
-          </a:prstGeom>
-          <a:noFill/>
-          <a:ln/>
-        </p:spPr>
-        <p:txBody>
-          <a:bodyPr wrap="square" lIns="0" tIns="0" rIns="0" bIns="0" rtlCol="0" anchor="t"/>
-          <a:lstStyle/>
-          <a:p>
-            <a:pPr algn="l" indent="0" marL="0">
-              <a:lnSpc>
-                <a:spcPts val="1680"/>
-              </a:lnSpc>
-              <a:spcBef>
-                <a:spcPts val="300"/>
-              </a:spcBef>
-              <a:spcAft>
-                <a:spcPts val="300"/>
-              </a:spcAft>
-              <a:buNone/>
-            </a:pPr>
-            <a:r>
-              <a:rPr lang="en-US" sz="1200" dirty="0">
-                <a:solidFill>
-                  <a:srgbClr val="1A1A1A"/>
-                </a:solidFill>
-                <a:latin typeface="Georgia" pitchFamily="34" charset="0"/>
-                <a:ea typeface="Georgia" pitchFamily="34" charset="-122"/>
-                <a:cs typeface="Georgia" pitchFamily="34" charset="-120"/>
-              </a:rPr>
-              <a:t>Take 3 student answers. Don't correct.</a:t>
-            </a:r>
-            <a:endParaRPr lang="en-US" sz="1200" dirty="0"/>
-          </a:p>
-        </p:txBody>
-      </p:sp>
-      <p:sp>
-        <p:nvSpPr>
-          <p:cNvPr id="6" name="Text 4"/>
           <p:cNvSpPr/>
           <p:nvPr/>
         </p:nvSpPr>
@@ -3049,7 +4546,7 @@
                 <a:ea typeface="Times New Roman" pitchFamily="34" charset="-122"/>
                 <a:cs typeface="Times New Roman" pitchFamily="34" charset="-120"/>
               </a:rPr>
-              <a:t>Core (25 min)</a:t>
+              <a:t>Warm-up (5 min)</a:t>
             </a:r>
             <a:endParaRPr lang="en-US" sz="1800" dirty="0"/>
           </a:p>
@@ -3063,8 +4560,8 @@
         </p:nvSpPr>
         <p:spPr>
           <a:xfrm>
-            <a:off x="634901" y="883593"/>
-            <a:ext cx="8102798" cy="487561"/>
+            <a:off x="406301" y="870942"/>
+            <a:ext cx="8498026" cy="213271"/>
           </a:xfrm>
           <a:prstGeom prst="rect">
             <a:avLst/>
@@ -3076,18 +4573,20 @@
           <a:bodyPr wrap="square" lIns="0" tIns="0" rIns="0" bIns="0" rtlCol="0" anchor="t"/>
           <a:lstStyle/>
           <a:p>
-            <a:pPr algn="l" marL="342900" indent="-342900">
-              <a:lnSpc>
-                <a:spcPts val="1620"/>
-              </a:lnSpc>
-              <a:spcAft>
-                <a:spcPts val="300"/>
-              </a:spcAft>
-              <a:buSzPct val="100000"/>
-              <a:buChar char="•"/>
-            </a:pPr>
-            <a:r>
-              <a:rPr lang="en-US" sz="1200" b="1" dirty="0">
+            <a:pPr algn="l" indent="0" marL="0">
+              <a:lnSpc>
+                <a:spcPts val="1680"/>
+              </a:lnSpc>
+              <a:spcBef>
+                <a:spcPts val="300"/>
+              </a:spcBef>
+              <a:spcAft>
+                <a:spcPts val="300"/>
+              </a:spcAft>
+              <a:buNone/>
+            </a:pPr>
+            <a:r>
+              <a:rPr lang="en-US" sz="1200" dirty="0">
                 <a:solidFill>
                   <a:srgbClr val="1A1A1A"/>
                 </a:solidFill>
@@ -3095,19 +4594,22 @@
                 <a:ea typeface="Georgia" pitchFamily="34" charset="-122"/>
                 <a:cs typeface="Georgia" pitchFamily="34" charset="-120"/>
               </a:rPr>
-              <a:t>The term "IKS" is recent.</a:t>
+              <a:t>Provocation: </a:t>
             </a:r>
             <a:pPr algn="l" indent="0" marL="0">
               <a:lnSpc>
-                <a:spcPts val="1620"/>
-              </a:lnSpc>
-              <a:spcAft>
-                <a:spcPts val="300"/>
-              </a:spcAft>
-              <a:buNone/>
-            </a:pPr>
-            <a:r>
-              <a:rPr lang="en-US" sz="1200" dirty="0">
+                <a:spcPts val="1680"/>
+              </a:lnSpc>
+              <a:spcBef>
+                <a:spcPts val="300"/>
+              </a:spcBef>
+              <a:spcAft>
+                <a:spcPts val="300"/>
+              </a:spcAft>
+              <a:buNone/>
+            </a:pPr>
+            <a:r>
+              <a:rPr lang="en-US" sz="1200" i="1" dirty="0">
                 <a:solidFill>
                   <a:srgbClr val="1A1A1A"/>
                 </a:solidFill>
@@ -3115,19 +4617,47 @@
                 <a:ea typeface="Georgia" pitchFamily="34" charset="-122"/>
                 <a:cs typeface="Georgia" pitchFamily="34" charset="-120"/>
               </a:rPr>
-              <a:t> Started gaining traction post-2000, codified by NEP 2020 §4.6. The </a:t>
-            </a:r>
+              <a:t>"'Indian Knowledge Systems' — is that a coherent category, or a political slogan?"</a:t>
+            </a:r>
+            <a:endParaRPr lang="en-US" sz="1200" dirty="0"/>
+          </a:p>
+        </p:txBody>
+      </p:sp>
+      <p:sp>
+        <p:nvSpPr>
+          <p:cNvPr id="5" name="Text 3"/>
+          <p:cNvSpPr/>
+          <p:nvPr/>
+        </p:nvSpPr>
+        <p:spPr>
+          <a:xfrm>
+            <a:off x="406301" y="1160413"/>
+            <a:ext cx="8498026" cy="213271"/>
+          </a:xfrm>
+          <a:prstGeom prst="rect">
+            <a:avLst/>
+          </a:prstGeom>
+          <a:noFill/>
+          <a:ln/>
+        </p:spPr>
+        <p:txBody>
+          <a:bodyPr wrap="square" lIns="0" tIns="0" rIns="0" bIns="0" rtlCol="0" anchor="t"/>
+          <a:lstStyle/>
+          <a:p>
             <a:pPr algn="l" indent="0" marL="0">
               <a:lnSpc>
-                <a:spcPts val="1620"/>
-              </a:lnSpc>
-              <a:spcAft>
-                <a:spcPts val="300"/>
-              </a:spcAft>
-              <a:buNone/>
-            </a:pPr>
-            <a:r>
-              <a:rPr lang="en-US" sz="1200" i="1" dirty="0">
+                <a:spcPts val="1680"/>
+              </a:lnSpc>
+              <a:spcBef>
+                <a:spcPts val="300"/>
+              </a:spcBef>
+              <a:spcAft>
+                <a:spcPts val="300"/>
+              </a:spcAft>
+              <a:buNone/>
+            </a:pPr>
+            <a:r>
+              <a:rPr lang="en-US" sz="1200" dirty="0">
                 <a:solidFill>
                   <a:srgbClr val="1A1A1A"/>
                 </a:solidFill>
@@ -3135,27 +4665,7 @@
                 <a:ea typeface="Georgia" pitchFamily="34" charset="-122"/>
                 <a:cs typeface="Georgia" pitchFamily="34" charset="-120"/>
               </a:rPr>
-              <a:t>contents</a:t>
-            </a:r>
-            <a:pPr algn="l" indent="0" marL="0">
-              <a:lnSpc>
-                <a:spcPts val="1620"/>
-              </a:lnSpc>
-              <a:spcAft>
-                <a:spcPts val="300"/>
-              </a:spcAft>
-              <a:buNone/>
-            </a:pPr>
-            <a:r>
-              <a:rPr lang="en-US" sz="1200" dirty="0">
-                <a:solidFill>
-                  <a:srgbClr val="1A1A1A"/>
-                </a:solidFill>
-                <a:latin typeface="Georgia" pitchFamily="34" charset="0"/>
-                <a:ea typeface="Georgia" pitchFamily="34" charset="-122"/>
-                <a:cs typeface="Georgia" pitchFamily="34" charset="-120"/>
-              </a:rPr>
-              <a:t> — Vedic literature, Sāṅkhya philosophy, Pāṇini's grammar, Bhāskara's mathematics, Patañjali's yoga, etc. — are millennia old.</a:t>
+              <a:t>Take 3 student answers. Don't correct.</a:t>
             </a:r>
             <a:endParaRPr lang="en-US" sz="1200" dirty="0"/>
           </a:p>
@@ -3163,535 +4673,13 @@
       </p:sp>
       <p:sp>
         <p:nvSpPr>
-          <p:cNvPr id="5" name="Text 3"/>
-          <p:cNvSpPr/>
-          <p:nvPr/>
-        </p:nvSpPr>
-        <p:spPr>
-          <a:xfrm>
-            <a:off x="634901" y="1472654"/>
-            <a:ext cx="8102798" cy="281880"/>
-          </a:xfrm>
-          <a:prstGeom prst="rect">
-            <a:avLst/>
-          </a:prstGeom>
-          <a:noFill/>
-          <a:ln/>
-        </p:spPr>
-        <p:txBody>
-          <a:bodyPr wrap="square" lIns="0" tIns="0" rIns="0" bIns="0" rtlCol="0" anchor="t"/>
-          <a:lstStyle/>
-          <a:p>
-            <a:pPr algn="l" marL="342900" indent="-342900">
-              <a:lnSpc>
-                <a:spcPts val="1620"/>
-              </a:lnSpc>
-              <a:spcAft>
-                <a:spcPts val="300"/>
-              </a:spcAft>
-              <a:buSzPct val="100000"/>
-              <a:buChar char="•"/>
-            </a:pPr>
-            <a:r>
-              <a:rPr lang="en-US" sz="1200" b="1" dirty="0">
-                <a:solidFill>
-                  <a:srgbClr val="1A1A1A"/>
-                </a:solidFill>
-                <a:latin typeface="Georgia" pitchFamily="34" charset="0"/>
-                <a:ea typeface="Georgia" pitchFamily="34" charset="-122"/>
-                <a:cs typeface="Georgia" pitchFamily="34" charset="-120"/>
-              </a:rPr>
-              <a:t>The boundary problem:</a:t>
-            </a:r>
-            <a:endParaRPr lang="en-US" sz="1200" dirty="0"/>
-          </a:p>
-        </p:txBody>
-      </p:sp>
-      <p:sp>
-        <p:nvSpPr>
           <p:cNvPr id="6" name="Text 4"/>
           <p:cNvSpPr/>
           <p:nvPr/>
         </p:nvSpPr>
         <p:spPr>
           <a:xfrm>
-            <a:off x="406301" y="1843385"/>
-            <a:ext cx="8498026" cy="639812"/>
-          </a:xfrm>
-          <a:prstGeom prst="rect">
-            <a:avLst/>
-          </a:prstGeom>
-          <a:noFill/>
-          <a:ln/>
-        </p:spPr>
-        <p:txBody>
-          <a:bodyPr wrap="square" lIns="0" tIns="0" rIns="0" bIns="0" rtlCol="0" anchor="t"/>
-          <a:lstStyle/>
-          <a:p>
-            <a:pPr algn="l" indent="0" marL="0">
-              <a:lnSpc>
-                <a:spcPts val="1680"/>
-              </a:lnSpc>
-              <a:spcBef>
-                <a:spcPts val="300"/>
-              </a:spcBef>
-              <a:spcAft>
-                <a:spcPts val="300"/>
-              </a:spcAft>
-              <a:buNone/>
-            </a:pPr>
-            <a:r>
-              <a:rPr lang="en-US" sz="1200" dirty="0">
-                <a:solidFill>
-                  <a:srgbClr val="1A1A1A"/>
-                </a:solidFill>
-                <a:latin typeface="Georgia" pitchFamily="34" charset="0"/>
-                <a:ea typeface="Georgia" pitchFamily="34" charset="-122"/>
-                <a:cs typeface="Georgia" pitchFamily="34" charset="-120"/>
-              </a:rPr>
-              <a:t>– Is "Buddhism" IKS? (Originated in India; spread to East Asia and beyond.) – Is "Sanskrit poetics" IKS? (Yes, but it's also "Sanskrit literature.") – Is "Mughal architecture" IKS? (Mixed Persianate-Indic; depends on definition.) – Is "Vedic mathematics" (Tirthaji 1965) IKS? (20th-c. synthesis with Vedic </a:t>
-            </a:r>
-            <a:pPr algn="l" indent="0" marL="0">
-              <a:lnSpc>
-                <a:spcPts val="1680"/>
-              </a:lnSpc>
-              <a:spcBef>
-                <a:spcPts val="300"/>
-              </a:spcBef>
-              <a:spcAft>
-                <a:spcPts val="300"/>
-              </a:spcAft>
-              <a:buNone/>
-            </a:pPr>
-            <a:r>
-              <a:rPr lang="en-US" sz="1200" i="1" dirty="0">
-                <a:solidFill>
-                  <a:srgbClr val="1A1A1A"/>
-                </a:solidFill>
-                <a:latin typeface="Georgia" pitchFamily="34" charset="0"/>
-                <a:ea typeface="Georgia" pitchFamily="34" charset="-122"/>
-                <a:cs typeface="Georgia" pitchFamily="34" charset="-120"/>
-              </a:rPr>
-              <a:t>label</a:t>
-            </a:r>
-            <a:pPr algn="l" indent="0" marL="0">
-              <a:lnSpc>
-                <a:spcPts val="1680"/>
-              </a:lnSpc>
-              <a:spcBef>
-                <a:spcPts val="300"/>
-              </a:spcBef>
-              <a:spcAft>
-                <a:spcPts val="300"/>
-              </a:spcAft>
-              <a:buNone/>
-            </a:pPr>
-            <a:r>
-              <a:rPr lang="en-US" sz="1200" dirty="0">
-                <a:solidFill>
-                  <a:srgbClr val="1A1A1A"/>
-                </a:solidFill>
-                <a:latin typeface="Georgia" pitchFamily="34" charset="0"/>
-                <a:ea typeface="Georgia" pitchFamily="34" charset="-122"/>
-                <a:cs typeface="Georgia" pitchFamily="34" charset="-120"/>
-              </a:rPr>
-              <a:t>.)</a:t>
-            </a:r>
-            <a:endParaRPr lang="en-US" sz="1200" dirty="0"/>
-          </a:p>
-        </p:txBody>
-      </p:sp>
-      <p:sp>
-        <p:nvSpPr>
-          <p:cNvPr id="7" name="Text 5"/>
-          <p:cNvSpPr/>
-          <p:nvPr/>
-        </p:nvSpPr>
-        <p:spPr>
-          <a:xfrm>
-            <a:off x="634901" y="2572048"/>
-            <a:ext cx="8102798" cy="281880"/>
-          </a:xfrm>
-          <a:prstGeom prst="rect">
-            <a:avLst/>
-          </a:prstGeom>
-          <a:noFill/>
-          <a:ln/>
-        </p:spPr>
-        <p:txBody>
-          <a:bodyPr wrap="square" lIns="0" tIns="0" rIns="0" bIns="0" rtlCol="0" anchor="t"/>
-          <a:lstStyle/>
-          <a:p>
-            <a:pPr algn="l" marL="342900" indent="-342900">
-              <a:lnSpc>
-                <a:spcPts val="1620"/>
-              </a:lnSpc>
-              <a:spcAft>
-                <a:spcPts val="300"/>
-              </a:spcAft>
-              <a:buSzPct val="100000"/>
-              <a:buChar char="•"/>
-            </a:pPr>
-            <a:r>
-              <a:rPr lang="en-US" sz="1200" b="1" dirty="0">
-                <a:solidFill>
-                  <a:srgbClr val="1A1A1A"/>
-                </a:solidFill>
-                <a:latin typeface="Georgia" pitchFamily="34" charset="0"/>
-                <a:ea typeface="Georgia" pitchFamily="34" charset="-122"/>
-                <a:cs typeface="Georgia" pitchFamily="34" charset="-120"/>
-              </a:rPr>
-              <a:t>Three honest framings to choose from</a:t>
-            </a:r>
-            <a:pPr algn="l" indent="0" marL="0">
-              <a:lnSpc>
-                <a:spcPts val="1620"/>
-              </a:lnSpc>
-              <a:spcAft>
-                <a:spcPts val="300"/>
-              </a:spcAft>
-              <a:buNone/>
-            </a:pPr>
-            <a:r>
-              <a:rPr lang="en-US" sz="1200" dirty="0">
-                <a:solidFill>
-                  <a:srgbClr val="1A1A1A"/>
-                </a:solidFill>
-                <a:latin typeface="Georgia" pitchFamily="34" charset="0"/>
-                <a:ea typeface="Georgia" pitchFamily="34" charset="-122"/>
-                <a:cs typeface="Georgia" pitchFamily="34" charset="-120"/>
-              </a:rPr>
-              <a:t> (write on board):</a:t>
-            </a:r>
-            <a:endParaRPr lang="en-US" sz="1200" dirty="0"/>
-          </a:p>
-        </p:txBody>
-      </p:sp>
-      <p:sp>
-        <p:nvSpPr>
-          <p:cNvPr id="8" name="Text 6"/>
-          <p:cNvSpPr/>
-          <p:nvPr/>
-        </p:nvSpPr>
-        <p:spPr>
-          <a:xfrm>
-            <a:off x="406301" y="2942779"/>
-            <a:ext cx="8498026" cy="213271"/>
-          </a:xfrm>
-          <a:prstGeom prst="rect">
-            <a:avLst/>
-          </a:prstGeom>
-          <a:noFill/>
-          <a:ln/>
-        </p:spPr>
-        <p:txBody>
-          <a:bodyPr wrap="square" lIns="0" tIns="0" rIns="0" bIns="0" rtlCol="0" anchor="t"/>
-          <a:lstStyle/>
-          <a:p>
-            <a:pPr algn="l" indent="0" marL="0">
-              <a:lnSpc>
-                <a:spcPts val="1680"/>
-              </a:lnSpc>
-              <a:spcBef>
-                <a:spcPts val="300"/>
-              </a:spcBef>
-              <a:spcAft>
-                <a:spcPts val="300"/>
-              </a:spcAft>
-              <a:buNone/>
-            </a:pPr>
-            <a:r>
-              <a:rPr lang="en-US" sz="1200" i="1" dirty="0">
-                <a:solidFill>
-                  <a:srgbClr val="1A1A1A"/>
-                </a:solidFill>
-                <a:latin typeface="Georgia" pitchFamily="34" charset="0"/>
-                <a:ea typeface="Georgia" pitchFamily="34" charset="-122"/>
-                <a:cs typeface="Georgia" pitchFamily="34" charset="-120"/>
-              </a:rPr>
-              <a:t>Each row: Framing · Strength · Weakness.</a:t>
-            </a:r>
-            <a:endParaRPr lang="en-US" sz="1200" dirty="0"/>
-          </a:p>
-        </p:txBody>
-      </p:sp>
-      <p:sp>
-        <p:nvSpPr>
-          <p:cNvPr id="9" name="Text 7"/>
-          <p:cNvSpPr/>
-          <p:nvPr/>
-        </p:nvSpPr>
-        <p:spPr>
-          <a:xfrm>
-            <a:off x="634901" y="3244900"/>
-            <a:ext cx="8102798" cy="975122"/>
-          </a:xfrm>
-          <a:prstGeom prst="rect">
-            <a:avLst/>
-          </a:prstGeom>
-          <a:noFill/>
-          <a:ln/>
-        </p:spPr>
-        <p:txBody>
-          <a:bodyPr wrap="square" lIns="0" tIns="0" rIns="0" bIns="0" rtlCol="0" anchor="t"/>
-          <a:lstStyle/>
-          <a:p>
-            <a:pPr algn="l" marL="342900" indent="-342900">
-              <a:lnSpc>
-                <a:spcPts val="1620"/>
-              </a:lnSpc>
-              <a:spcAft>
-                <a:spcPts val="300"/>
-              </a:spcAft>
-              <a:buSzPct val="100000"/>
-              <a:buChar char="•"/>
-            </a:pPr>
-            <a:r>
-              <a:rPr lang="en-US" sz="1200" b="1" dirty="0">
-                <a:solidFill>
-                  <a:srgbClr val="1A1A1A"/>
-                </a:solidFill>
-                <a:latin typeface="Georgia" pitchFamily="34" charset="0"/>
-                <a:ea typeface="Georgia" pitchFamily="34" charset="-122"/>
-                <a:cs typeface="Georgia" pitchFamily="34" charset="-120"/>
-              </a:rPr>
-              <a:t>"IKS = pre-modern Indian intellectual production"</a:t>
-            </a:r>
-            <a:pPr algn="l" indent="0" marL="0">
-              <a:lnSpc>
-                <a:spcPts val="1620"/>
-              </a:lnSpc>
-              <a:spcAft>
-                <a:spcPts val="300"/>
-              </a:spcAft>
-              <a:buNone/>
-            </a:pPr>
-            <a:r>
-              <a:rPr lang="en-US" sz="1200" dirty="0">
-                <a:solidFill>
-                  <a:srgbClr val="1A1A1A"/>
-                </a:solidFill>
-                <a:latin typeface="Georgia" pitchFamily="34" charset="0"/>
-                <a:ea typeface="Georgia" pitchFamily="34" charset="-122"/>
-                <a:cs typeface="Georgia" pitchFamily="34" charset="-120"/>
-              </a:rPr>
-              <a:t> — Inclusive · Vague boundaries</a:t>
-            </a:r>
-            <a:endParaRPr lang="en-US" sz="1200" dirty="0"/>
-          </a:p>
-          <a:p>
-            <a:pPr algn="l" marL="342900" indent="-342900">
-              <a:lnSpc>
-                <a:spcPts val="1620"/>
-              </a:lnSpc>
-              <a:spcAft>
-                <a:spcPts val="300"/>
-              </a:spcAft>
-              <a:buSzPct val="100000"/>
-              <a:buChar char="•"/>
-            </a:pPr>
-            <a:r>
-              <a:rPr lang="en-US" sz="1200" b="1" dirty="0">
-                <a:solidFill>
-                  <a:srgbClr val="1A1A1A"/>
-                </a:solidFill>
-                <a:latin typeface="Georgia" pitchFamily="34" charset="0"/>
-                <a:ea typeface="Georgia" pitchFamily="34" charset="-122"/>
-                <a:cs typeface="Georgia" pitchFamily="34" charset="-120"/>
-              </a:rPr>
-              <a:t>"IKS = canonical Brahmanical knowledge systems"</a:t>
-            </a:r>
-            <a:pPr algn="l" indent="0" marL="0">
-              <a:lnSpc>
-                <a:spcPts val="1620"/>
-              </a:lnSpc>
-              <a:spcAft>
-                <a:spcPts val="300"/>
-              </a:spcAft>
-              <a:buNone/>
-            </a:pPr>
-            <a:r>
-              <a:rPr lang="en-US" sz="1200" dirty="0">
-                <a:solidFill>
-                  <a:srgbClr val="1A1A1A"/>
-                </a:solidFill>
-                <a:latin typeface="Georgia" pitchFamily="34" charset="0"/>
-                <a:ea typeface="Georgia" pitchFamily="34" charset="-122"/>
-                <a:cs typeface="Georgia" pitchFamily="34" charset="-120"/>
-              </a:rPr>
-              <a:t> — Specific · Excludes Buddhist, Tantric, regional</a:t>
-            </a:r>
-            <a:endParaRPr lang="en-US" sz="1200" dirty="0"/>
-          </a:p>
-          <a:p>
-            <a:pPr algn="l" marL="342900" indent="-342900">
-              <a:lnSpc>
-                <a:spcPts val="1620"/>
-              </a:lnSpc>
-              <a:spcAft>
-                <a:spcPts val="300"/>
-              </a:spcAft>
-              <a:buSzPct val="100000"/>
-              <a:buChar char="•"/>
-            </a:pPr>
-            <a:r>
-              <a:rPr lang="en-US" sz="1200" b="1" dirty="0">
-                <a:solidFill>
-                  <a:srgbClr val="1A1A1A"/>
-                </a:solidFill>
-                <a:latin typeface="Georgia" pitchFamily="34" charset="0"/>
-                <a:ea typeface="Georgia" pitchFamily="34" charset="-122"/>
-                <a:cs typeface="Georgia" pitchFamily="34" charset="-120"/>
-              </a:rPr>
-              <a:t>"IKS = anything taught under the NEP §4.6 umbrella"</a:t>
-            </a:r>
-            <a:pPr algn="l" indent="0" marL="0">
-              <a:lnSpc>
-                <a:spcPts val="1620"/>
-              </a:lnSpc>
-              <a:spcAft>
-                <a:spcPts val="300"/>
-              </a:spcAft>
-              <a:buNone/>
-            </a:pPr>
-            <a:r>
-              <a:rPr lang="en-US" sz="1200" dirty="0">
-                <a:solidFill>
-                  <a:srgbClr val="1A1A1A"/>
-                </a:solidFill>
-                <a:latin typeface="Georgia" pitchFamily="34" charset="0"/>
-                <a:ea typeface="Georgia" pitchFamily="34" charset="-122"/>
-                <a:cs typeface="Georgia" pitchFamily="34" charset="-120"/>
-              </a:rPr>
-              <a:t> — Operational · Political construction; varies by implementer</a:t>
-            </a:r>
-            <a:endParaRPr lang="en-US" sz="1200" dirty="0"/>
-          </a:p>
-        </p:txBody>
-      </p:sp>
-      <p:sp>
-        <p:nvSpPr>
-          <p:cNvPr id="10" name="Text 8"/>
-          <p:cNvSpPr/>
-          <p:nvPr/>
-        </p:nvSpPr>
-        <p:spPr>
-          <a:xfrm>
-            <a:off x="406301" y="4308872"/>
-            <a:ext cx="8498026" cy="213271"/>
-          </a:xfrm>
-          <a:prstGeom prst="rect">
-            <a:avLst/>
-          </a:prstGeom>
-          <a:noFill/>
-          <a:ln/>
-        </p:spPr>
-        <p:txBody>
-          <a:bodyPr wrap="square" lIns="0" tIns="0" rIns="0" bIns="0" rtlCol="0" anchor="t"/>
-          <a:lstStyle/>
-          <a:p>
-            <a:pPr algn="l" indent="0" marL="0">
-              <a:lnSpc>
-                <a:spcPts val="1680"/>
-              </a:lnSpc>
-              <a:spcBef>
-                <a:spcPts val="300"/>
-              </a:spcBef>
-              <a:spcAft>
-                <a:spcPts val="300"/>
-              </a:spcAft>
-              <a:buNone/>
-            </a:pPr>
-            <a:r>
-              <a:rPr lang="en-US" sz="1200" dirty="0">
-                <a:solidFill>
-                  <a:srgbClr val="1A1A1A"/>
-                </a:solidFill>
-                <a:latin typeface="Georgia" pitchFamily="34" charset="0"/>
-                <a:ea typeface="Georgia" pitchFamily="34" charset="-122"/>
-                <a:cs typeface="Georgia" pitchFamily="34" charset="-120"/>
-              </a:rPr>
-              <a:t>Each is defensible. Pick one knowingly, not by default.</a:t>
-            </a:r>
-            <a:endParaRPr lang="en-US" sz="1200" dirty="0"/>
-          </a:p>
-        </p:txBody>
-      </p:sp>
-      <p:sp>
-        <p:nvSpPr>
-          <p:cNvPr id="11" name="Text 9"/>
-          <p:cNvSpPr/>
-          <p:nvPr/>
-        </p:nvSpPr>
-        <p:spPr>
-          <a:xfrm>
-            <a:off x="634901" y="4610993"/>
-            <a:ext cx="8102798" cy="281880"/>
-          </a:xfrm>
-          <a:prstGeom prst="rect">
-            <a:avLst/>
-          </a:prstGeom>
-          <a:noFill/>
-          <a:ln/>
-        </p:spPr>
-        <p:txBody>
-          <a:bodyPr wrap="square" lIns="0" tIns="0" rIns="0" bIns="0" rtlCol="0" anchor="t"/>
-          <a:lstStyle/>
-          <a:p>
-            <a:pPr algn="l" marL="342900" indent="-342900">
-              <a:lnSpc>
-                <a:spcPts val="1620"/>
-              </a:lnSpc>
-              <a:spcAft>
-                <a:spcPts val="300"/>
-              </a:spcAft>
-              <a:buSzPct val="100000"/>
-              <a:buChar char="•"/>
-            </a:pPr>
-            <a:r>
-              <a:rPr lang="en-US" sz="1200" b="1" dirty="0">
-                <a:solidFill>
-                  <a:srgbClr val="1A1A1A"/>
-                </a:solidFill>
-                <a:latin typeface="Georgia" pitchFamily="34" charset="0"/>
-                <a:ea typeface="Georgia" pitchFamily="34" charset="-122"/>
-                <a:cs typeface="Georgia" pitchFamily="34" charset="-120"/>
-              </a:rPr>
-              <a:t>Read aloud NEP 2020 §4.6.</a:t>
-            </a:r>
-            <a:pPr algn="l" indent="0" marL="0">
-              <a:lnSpc>
-                <a:spcPts val="1620"/>
-              </a:lnSpc>
-              <a:spcAft>
-                <a:spcPts val="300"/>
-              </a:spcAft>
-              <a:buNone/>
-            </a:pPr>
-            <a:r>
-              <a:rPr lang="en-US" sz="1200" dirty="0">
-                <a:solidFill>
-                  <a:srgbClr val="1A1A1A"/>
-                </a:solidFill>
-                <a:latin typeface="Georgia" pitchFamily="34" charset="0"/>
-                <a:ea typeface="Georgia" pitchFamily="34" charset="-122"/>
-                <a:cs typeface="Georgia" pitchFamily="34" charset="-120"/>
-              </a:rPr>
-              <a:t> Discuss: what does the policy say IKS should include? What does it leave open?</a:t>
-            </a:r>
-            <a:endParaRPr lang="en-US" sz="1200" dirty="0"/>
-          </a:p>
-        </p:txBody>
-      </p:sp>
-      <p:sp>
-        <p:nvSpPr>
-          <p:cNvPr id="12" name="Text 10"/>
-          <p:cNvSpPr/>
-          <p:nvPr/>
-        </p:nvSpPr>
-        <p:spPr>
-          <a:xfrm>
-            <a:off x="406301" y="5057924"/>
+            <a:off x="406301" y="4434929"/>
             <a:ext cx="8498026" cy="213271"/>
           </a:xfrm>
           <a:prstGeom prst="rect">
@@ -3835,7 +4823,7 @@
                 <a:ea typeface="Times New Roman" pitchFamily="34" charset="-122"/>
                 <a:cs typeface="Times New Roman" pitchFamily="34" charset="-120"/>
               </a:rPr>
-              <a:t>Discussion (10 min)</a:t>
+              <a:t>Core (25 min)</a:t>
             </a:r>
             <a:endParaRPr lang="en-US" sz="1800" dirty="0"/>
           </a:p>
@@ -3849,8 +4837,8 @@
         </p:nvSpPr>
         <p:spPr>
           <a:xfrm>
-            <a:off x="406301" y="870942"/>
-            <a:ext cx="8498026" cy="213271"/>
+            <a:off x="634901" y="883593"/>
+            <a:ext cx="8102798" cy="487561"/>
           </a:xfrm>
           <a:prstGeom prst="rect">
             <a:avLst/>
@@ -3862,20 +4850,18 @@
           <a:bodyPr wrap="square" lIns="0" tIns="0" rIns="0" bIns="0" rtlCol="0" anchor="t"/>
           <a:lstStyle/>
           <a:p>
-            <a:pPr algn="l" indent="0" marL="0">
-              <a:lnSpc>
-                <a:spcPts val="1680"/>
-              </a:lnSpc>
-              <a:spcBef>
-                <a:spcPts val="300"/>
-              </a:spcBef>
-              <a:spcAft>
-                <a:spcPts val="300"/>
-              </a:spcAft>
-              <a:buNone/>
-            </a:pPr>
-            <a:r>
-              <a:rPr lang="en-US" sz="1200" dirty="0">
+            <a:pPr algn="l" marL="342900" indent="-342900">
+              <a:lnSpc>
+                <a:spcPts val="1620"/>
+              </a:lnSpc>
+              <a:spcAft>
+                <a:spcPts val="300"/>
+              </a:spcAft>
+              <a:buSzPct val="100000"/>
+              <a:buChar char="•"/>
+            </a:pPr>
+            <a:r>
+              <a:rPr lang="en-US" sz="1200" b="1" dirty="0">
                 <a:solidFill>
                   <a:srgbClr val="1A1A1A"/>
                 </a:solidFill>
@@ -3883,22 +4869,19 @@
                 <a:ea typeface="Georgia" pitchFamily="34" charset="-122"/>
                 <a:cs typeface="Georgia" pitchFamily="34" charset="-120"/>
               </a:rPr>
-              <a:t>Open question: </a:t>
+              <a:t>The term "IKS" is recent.</a:t>
             </a:r>
             <a:pPr algn="l" indent="0" marL="0">
               <a:lnSpc>
-                <a:spcPts val="1680"/>
-              </a:lnSpc>
-              <a:spcBef>
-                <a:spcPts val="300"/>
-              </a:spcBef>
-              <a:spcAft>
-                <a:spcPts val="300"/>
-              </a:spcAft>
-              <a:buNone/>
-            </a:pPr>
-            <a:r>
-              <a:rPr lang="en-US" sz="1200" i="1" dirty="0">
+                <a:spcPts val="1620"/>
+              </a:lnSpc>
+              <a:spcAft>
+                <a:spcPts val="300"/>
+              </a:spcAft>
+              <a:buNone/>
+            </a:pPr>
+            <a:r>
+              <a:rPr lang="en-US" sz="1200" dirty="0">
                 <a:solidFill>
                   <a:srgbClr val="1A1A1A"/>
                 </a:solidFill>
@@ -3906,47 +4889,19 @@
                 <a:ea typeface="Georgia" pitchFamily="34" charset="-122"/>
                 <a:cs typeface="Georgia" pitchFamily="34" charset="-120"/>
               </a:rPr>
-              <a:t>"Which framing would you use in your paper? Why?"</a:t>
-            </a:r>
-            <a:endParaRPr lang="en-US" sz="1200" dirty="0"/>
-          </a:p>
-        </p:txBody>
-      </p:sp>
-      <p:sp>
-        <p:nvSpPr>
-          <p:cNvPr id="5" name="Text 3"/>
-          <p:cNvSpPr/>
-          <p:nvPr/>
-        </p:nvSpPr>
-        <p:spPr>
-          <a:xfrm>
-            <a:off x="406301" y="1160413"/>
-            <a:ext cx="8498026" cy="213271"/>
-          </a:xfrm>
-          <a:prstGeom prst="rect">
-            <a:avLst/>
-          </a:prstGeom>
-          <a:noFill/>
-          <a:ln/>
-        </p:spPr>
-        <p:txBody>
-          <a:bodyPr wrap="square" lIns="0" tIns="0" rIns="0" bIns="0" rtlCol="0" anchor="t"/>
-          <a:lstStyle/>
-          <a:p>
+              <a:t> Started gaining traction post-2000, codified by NEP 2020 §4.6. The </a:t>
+            </a:r>
             <a:pPr algn="l" indent="0" marL="0">
               <a:lnSpc>
-                <a:spcPts val="1680"/>
-              </a:lnSpc>
-              <a:spcBef>
-                <a:spcPts val="300"/>
-              </a:spcBef>
-              <a:spcAft>
-                <a:spcPts val="300"/>
-              </a:spcAft>
-              <a:buNone/>
-            </a:pPr>
-            <a:r>
-              <a:rPr lang="en-US" sz="1200" dirty="0">
+                <a:spcPts val="1620"/>
+              </a:lnSpc>
+              <a:spcAft>
+                <a:spcPts val="300"/>
+              </a:spcAft>
+              <a:buNone/>
+            </a:pPr>
+            <a:r>
+              <a:rPr lang="en-US" sz="1200" i="1" dirty="0">
                 <a:solidFill>
                   <a:srgbClr val="1A1A1A"/>
                 </a:solidFill>
@@ -3954,7 +4909,27 @@
                 <a:ea typeface="Georgia" pitchFamily="34" charset="-122"/>
                 <a:cs typeface="Georgia" pitchFamily="34" charset="-120"/>
               </a:rPr>
-              <a:t>Take 4 student positions.</a:t>
+              <a:t>contents</a:t>
+            </a:r>
+            <a:pPr algn="l" indent="0" marL="0">
+              <a:lnSpc>
+                <a:spcPts val="1620"/>
+              </a:lnSpc>
+              <a:spcAft>
+                <a:spcPts val="300"/>
+              </a:spcAft>
+              <a:buNone/>
+            </a:pPr>
+            <a:r>
+              <a:rPr lang="en-US" sz="1200" dirty="0">
+                <a:solidFill>
+                  <a:srgbClr val="1A1A1A"/>
+                </a:solidFill>
+                <a:latin typeface="Georgia" pitchFamily="34" charset="0"/>
+                <a:ea typeface="Georgia" pitchFamily="34" charset="-122"/>
+                <a:cs typeface="Georgia" pitchFamily="34" charset="-120"/>
+              </a:rPr>
+              <a:t> — Vedic literature, Sāṅkhya philosophy, Pāṇini's grammar, Bhāskara's mathematics, Patañjali's yoga, etc. — are millennia old.</a:t>
             </a:r>
             <a:endParaRPr lang="en-US" sz="1200" dirty="0"/>
           </a:p>
@@ -3962,7 +4937,7 @@
       </p:sp>
       <p:sp>
         <p:nvSpPr>
-          <p:cNvPr id="6" name="Text 4"/>
+          <p:cNvPr id="5" name="Text 3"/>
           <p:cNvSpPr/>
           <p:nvPr/>
         </p:nvSpPr>
@@ -4112,7 +5087,7 @@
                 <a:ea typeface="Times New Roman" pitchFamily="34" charset="-122"/>
                 <a:cs typeface="Times New Roman" pitchFamily="34" charset="-120"/>
               </a:rPr>
-              <a:t>Wrap-up (5 min)</a:t>
+              <a:t>Core (25 min) (cont.)</a:t>
             </a:r>
             <a:endParaRPr lang="en-US" sz="1800" dirty="0"/>
           </a:p>
@@ -4126,8 +5101,8 @@
         </p:nvSpPr>
         <p:spPr>
           <a:xfrm>
-            <a:off x="406301" y="870942"/>
-            <a:ext cx="8498026" cy="213271"/>
+            <a:off x="634901" y="883593"/>
+            <a:ext cx="8102798" cy="281880"/>
           </a:xfrm>
           <a:prstGeom prst="rect">
             <a:avLst/>
@@ -4139,20 +5114,18 @@
           <a:bodyPr wrap="square" lIns="0" tIns="0" rIns="0" bIns="0" rtlCol="0" anchor="t"/>
           <a:lstStyle/>
           <a:p>
-            <a:pPr algn="l" indent="0" marL="0">
-              <a:lnSpc>
-                <a:spcPts val="1680"/>
-              </a:lnSpc>
-              <a:spcBef>
-                <a:spcPts val="300"/>
-              </a:spcBef>
-              <a:spcAft>
-                <a:spcPts val="300"/>
-              </a:spcAft>
-              <a:buNone/>
-            </a:pPr>
-            <a:r>
-              <a:rPr lang="en-US" sz="1200" dirty="0">
+            <a:pPr algn="l" marL="342900" indent="-342900">
+              <a:lnSpc>
+                <a:spcPts val="1620"/>
+              </a:lnSpc>
+              <a:spcAft>
+                <a:spcPts val="300"/>
+              </a:spcAft>
+              <a:buSzPct val="100000"/>
+              <a:buChar char="•"/>
+            </a:pPr>
+            <a:r>
+              <a:rPr lang="en-US" sz="1200" b="1" dirty="0">
                 <a:solidFill>
                   <a:srgbClr val="1A1A1A"/>
                 </a:solidFill>
@@ -4160,22 +5133,45 @@
                 <a:ea typeface="Georgia" pitchFamily="34" charset="-122"/>
                 <a:cs typeface="Georgia" pitchFamily="34" charset="-120"/>
               </a:rPr>
-              <a:t>– Preview Day 2: </a:t>
-            </a:r>
-            <a:pPr algn="l" indent="0" marL="0">
-              <a:lnSpc>
-                <a:spcPts val="1680"/>
-              </a:lnSpc>
-              <a:spcBef>
-                <a:spcPts val="300"/>
-              </a:spcBef>
-              <a:spcAft>
-                <a:spcPts val="300"/>
-              </a:spcAft>
-              <a:buNone/>
-            </a:pPr>
-            <a:r>
-              <a:rPr lang="en-US" sz="1200" i="1" dirty="0">
+              <a:t>The boundary problem:</a:t>
+            </a:r>
+            <a:endParaRPr lang="en-US" sz="1200" dirty="0"/>
+          </a:p>
+        </p:txBody>
+      </p:sp>
+      <p:sp>
+        <p:nvSpPr>
+          <p:cNvPr id="5" name="Text 3"/>
+          <p:cNvSpPr/>
+          <p:nvPr/>
+        </p:nvSpPr>
+        <p:spPr>
+          <a:xfrm>
+            <a:off x="634901" y="1266974"/>
+            <a:ext cx="8102798" cy="1013222"/>
+          </a:xfrm>
+          <a:prstGeom prst="rect">
+            <a:avLst/>
+          </a:prstGeom>
+          <a:noFill/>
+          <a:ln/>
+        </p:spPr>
+        <p:txBody>
+          <a:bodyPr wrap="square" lIns="0" tIns="0" rIns="0" bIns="0" rtlCol="0" anchor="t"/>
+          <a:lstStyle/>
+          <a:p>
+            <a:pPr algn="l" marL="342900" indent="-342900">
+              <a:lnSpc>
+                <a:spcPts val="1620"/>
+              </a:lnSpc>
+              <a:spcAft>
+                <a:spcPts val="300"/>
+              </a:spcAft>
+              <a:buSzPct val="100000"/>
+              <a:buChar char="•"/>
+            </a:pPr>
+            <a:r>
+              <a:rPr lang="en-US" sz="1200" dirty="0">
                 <a:solidFill>
                   <a:srgbClr val="1A1A1A"/>
                 </a:solidFill>
@@ -4183,15 +5179,127 @@
                 <a:ea typeface="Georgia" pitchFamily="34" charset="-122"/>
                 <a:cs typeface="Georgia" pitchFamily="34" charset="-120"/>
               </a:rPr>
-              <a:t>"Tomorrow — we read primary sources. Ṛg Veda 1.1 and Īśa Upaniṣad."</a:t>
+              <a:t>Is "Buddhism" IKS? (Originated in India; spread to East Asia and beyond.)</a:t>
             </a:r>
             <a:endParaRPr lang="en-US" sz="1200" dirty="0"/>
           </a:p>
-        </p:txBody>
-      </p:sp>
-      <p:sp>
-        <p:nvSpPr>
-          <p:cNvPr id="5" name="Text 3"/>
+          <a:p>
+            <a:pPr algn="l" marL="342900" indent="-342900">
+              <a:lnSpc>
+                <a:spcPts val="1620"/>
+              </a:lnSpc>
+              <a:spcAft>
+                <a:spcPts val="300"/>
+              </a:spcAft>
+              <a:buSzPct val="100000"/>
+              <a:buChar char="•"/>
+            </a:pPr>
+            <a:r>
+              <a:rPr lang="en-US" sz="1200" dirty="0">
+                <a:solidFill>
+                  <a:srgbClr val="1A1A1A"/>
+                </a:solidFill>
+                <a:latin typeface="Georgia" pitchFamily="34" charset="0"/>
+                <a:ea typeface="Georgia" pitchFamily="34" charset="-122"/>
+                <a:cs typeface="Georgia" pitchFamily="34" charset="-120"/>
+              </a:rPr>
+              <a:t>Is "Sanskrit poetics" IKS? (Yes, but it's also "Sanskrit literature.")</a:t>
+            </a:r>
+            <a:endParaRPr lang="en-US" sz="1200" dirty="0"/>
+          </a:p>
+          <a:p>
+            <a:pPr algn="l" marL="342900" indent="-342900">
+              <a:lnSpc>
+                <a:spcPts val="1620"/>
+              </a:lnSpc>
+              <a:spcAft>
+                <a:spcPts val="300"/>
+              </a:spcAft>
+              <a:buSzPct val="100000"/>
+              <a:buChar char="•"/>
+            </a:pPr>
+            <a:r>
+              <a:rPr lang="en-US" sz="1200" dirty="0">
+                <a:solidFill>
+                  <a:srgbClr val="1A1A1A"/>
+                </a:solidFill>
+                <a:latin typeface="Georgia" pitchFamily="34" charset="0"/>
+                <a:ea typeface="Georgia" pitchFamily="34" charset="-122"/>
+                <a:cs typeface="Georgia" pitchFamily="34" charset="-120"/>
+              </a:rPr>
+              <a:t>Is "Mughal architecture" IKS? (Mixed Persianate-Indic; depends on definition.)</a:t>
+            </a:r>
+            <a:endParaRPr lang="en-US" sz="1200" dirty="0"/>
+          </a:p>
+          <a:p>
+            <a:pPr algn="l" marL="342900" indent="-342900">
+              <a:lnSpc>
+                <a:spcPts val="1620"/>
+              </a:lnSpc>
+              <a:spcAft>
+                <a:spcPts val="300"/>
+              </a:spcAft>
+              <a:buSzPct val="100000"/>
+              <a:buChar char="•"/>
+            </a:pPr>
+            <a:r>
+              <a:rPr lang="en-US" sz="1200" dirty="0">
+                <a:solidFill>
+                  <a:srgbClr val="1A1A1A"/>
+                </a:solidFill>
+                <a:latin typeface="Georgia" pitchFamily="34" charset="0"/>
+                <a:ea typeface="Georgia" pitchFamily="34" charset="-122"/>
+                <a:cs typeface="Georgia" pitchFamily="34" charset="-120"/>
+              </a:rPr>
+              <a:t>Is "Vedic mathematics" (Tirthaji 1965) IKS? (20th-c. synthesis with Vedic </a:t>
+            </a:r>
+            <a:pPr algn="l" indent="0" marL="0">
+              <a:lnSpc>
+                <a:spcPts val="1620"/>
+              </a:lnSpc>
+              <a:spcAft>
+                <a:spcPts val="300"/>
+              </a:spcAft>
+              <a:buNone/>
+            </a:pPr>
+            <a:r>
+              <a:rPr lang="en-US" sz="1200" i="1" dirty="0">
+                <a:solidFill>
+                  <a:srgbClr val="1A1A1A"/>
+                </a:solidFill>
+                <a:latin typeface="Georgia" pitchFamily="34" charset="0"/>
+                <a:ea typeface="Georgia" pitchFamily="34" charset="-122"/>
+                <a:cs typeface="Georgia" pitchFamily="34" charset="-120"/>
+              </a:rPr>
+              <a:t>label</a:t>
+            </a:r>
+            <a:pPr algn="l" indent="0" marL="0">
+              <a:lnSpc>
+                <a:spcPts val="1620"/>
+              </a:lnSpc>
+              <a:spcAft>
+                <a:spcPts val="300"/>
+              </a:spcAft>
+              <a:buNone/>
+            </a:pPr>
+            <a:r>
+              <a:rPr lang="en-US" sz="1200" dirty="0">
+                <a:solidFill>
+                  <a:srgbClr val="1A1A1A"/>
+                </a:solidFill>
+                <a:latin typeface="Georgia" pitchFamily="34" charset="0"/>
+                <a:ea typeface="Georgia" pitchFamily="34" charset="-122"/>
+                <a:cs typeface="Georgia" pitchFamily="34" charset="-120"/>
+              </a:rPr>
+              <a:t>.)</a:t>
+            </a:r>
+            <a:endParaRPr lang="en-US" sz="1200" dirty="0"/>
+          </a:p>
+        </p:txBody>
+      </p:sp>
+      <p:sp>
+        <p:nvSpPr>
+          <p:cNvPr id="6" name="Text 4"/>
           <p:cNvSpPr/>
           <p:nvPr/>
         </p:nvSpPr>
@@ -4341,7 +5449,7 @@
                 <a:ea typeface="Times New Roman" pitchFamily="34" charset="-122"/>
                 <a:cs typeface="Times New Roman" pitchFamily="34" charset="-120"/>
               </a:rPr>
-              <a:t>Differentiation</a:t>
+              <a:t>Core (25 min) (cont.)</a:t>
             </a:r>
             <a:endParaRPr lang="en-US" sz="1800" dirty="0"/>
           </a:p>
@@ -4356,7 +5464,7 @@
         <p:spPr>
           <a:xfrm>
             <a:off x="634901" y="883593"/>
-            <a:ext cx="8102798" cy="525661"/>
+            <a:ext cx="8102798" cy="281880"/>
           </a:xfrm>
           <a:prstGeom prst="rect">
             <a:avLst/>
@@ -4387,7 +5495,7 @@
                 <a:ea typeface="Georgia" pitchFamily="34" charset="-122"/>
                 <a:cs typeface="Georgia" pitchFamily="34" charset="-120"/>
               </a:rPr>
-              <a:t>Tier up:</a:t>
+              <a:t>Three honest framings to choose from</a:t>
             </a:r>
             <a:pPr algn="l" indent="0" marL="0">
               <a:lnSpc>
@@ -4407,23 +5515,47 @@
                 <a:ea typeface="Georgia" pitchFamily="34" charset="-122"/>
                 <a:cs typeface="Georgia" pitchFamily="34" charset="-120"/>
               </a:rPr>
-              <a:t> Read Pollock (2006) ch. 1 on Sanskrit as cosmopolitan language.</a:t>
+              <a:t> (write on board):</a:t>
             </a:r>
             <a:endParaRPr lang="en-US" sz="1200" dirty="0"/>
           </a:p>
-          <a:p>
-            <a:pPr algn="l" marL="342900" indent="-342900">
-              <a:lnSpc>
-                <a:spcPts val="1620"/>
-              </a:lnSpc>
-              <a:spcAft>
-                <a:spcPts val="300"/>
-              </a:spcAft>
-              <a:buSzPct val="100000"/>
-              <a:buChar char="•"/>
-            </a:pPr>
-            <a:r>
-              <a:rPr lang="en-US" sz="1200" b="1" dirty="0">
+        </p:txBody>
+      </p:sp>
+      <p:sp>
+        <p:nvSpPr>
+          <p:cNvPr id="5" name="Text 3"/>
+          <p:cNvSpPr/>
+          <p:nvPr/>
+        </p:nvSpPr>
+        <p:spPr>
+          <a:xfrm>
+            <a:off x="406301" y="1254323"/>
+            <a:ext cx="8498026" cy="213271"/>
+          </a:xfrm>
+          <a:prstGeom prst="rect">
+            <a:avLst/>
+          </a:prstGeom>
+          <a:noFill/>
+          <a:ln/>
+        </p:spPr>
+        <p:txBody>
+          <a:bodyPr wrap="square" lIns="0" tIns="0" rIns="0" bIns="0" rtlCol="0" anchor="t"/>
+          <a:lstStyle/>
+          <a:p>
+            <a:pPr algn="l" indent="0" marL="0">
+              <a:lnSpc>
+                <a:spcPts val="1680"/>
+              </a:lnSpc>
+              <a:spcBef>
+                <a:spcPts val="300"/>
+              </a:spcBef>
+              <a:spcAft>
+                <a:spcPts val="300"/>
+              </a:spcAft>
+              <a:buNone/>
+            </a:pPr>
+            <a:r>
+              <a:rPr lang="en-US" sz="1200" i="1" dirty="0">
                 <a:solidFill>
                   <a:srgbClr val="1A1A1A"/>
                 </a:solidFill>
@@ -4431,27 +5563,7 @@
                 <a:ea typeface="Georgia" pitchFamily="34" charset="-122"/>
                 <a:cs typeface="Georgia" pitchFamily="34" charset="-120"/>
               </a:rPr>
-              <a:t>Tier down:</a:t>
-            </a:r>
-            <a:pPr algn="l" indent="0" marL="0">
-              <a:lnSpc>
-                <a:spcPts val="1620"/>
-              </a:lnSpc>
-              <a:spcAft>
-                <a:spcPts val="300"/>
-              </a:spcAft>
-              <a:buNone/>
-            </a:pPr>
-            <a:r>
-              <a:rPr lang="en-US" sz="1200" dirty="0">
-                <a:solidFill>
-                  <a:srgbClr val="1A1A1A"/>
-                </a:solidFill>
-                <a:latin typeface="Georgia" pitchFamily="34" charset="0"/>
-                <a:ea typeface="Georgia" pitchFamily="34" charset="-122"/>
-                <a:cs typeface="Georgia" pitchFamily="34" charset="-120"/>
-              </a:rPr>
-              <a:t> Focus on the three framings; don't worry about the policy text yet.</a:t>
+              <a:t>Each row: Framing · Strength · Weakness.</a:t>
             </a:r>
             <a:endParaRPr lang="en-US" sz="1200" dirty="0"/>
           </a:p>
@@ -4459,7 +5571,7 @@
       </p:sp>
       <p:sp>
         <p:nvSpPr>
-          <p:cNvPr id="5" name="Text 3"/>
+          <p:cNvPr id="6" name="Text 4"/>
           <p:cNvSpPr/>
           <p:nvPr/>
         </p:nvSpPr>
@@ -4609,7 +5721,7 @@
                 <a:ea typeface="Times New Roman" pitchFamily="34" charset="-122"/>
                 <a:cs typeface="Times New Roman" pitchFamily="34" charset="-120"/>
               </a:rPr>
-              <a:t>Teacher notes</a:t>
+              <a:t>Core (25 min) (cont.)</a:t>
             </a:r>
             <a:endParaRPr lang="en-US" sz="1800" dirty="0"/>
           </a:p>
@@ -4623,8 +5735,8 @@
         </p:nvSpPr>
         <p:spPr>
           <a:xfrm>
-            <a:off x="406301" y="870942"/>
-            <a:ext cx="8498026" cy="639812"/>
+            <a:off x="634901" y="883593"/>
+            <a:ext cx="8102798" cy="975122"/>
           </a:xfrm>
           <a:prstGeom prst="rect">
             <a:avLst/>
@@ -4636,20 +5748,18 @@
           <a:bodyPr wrap="square" lIns="0" tIns="0" rIns="0" bIns="0" rtlCol="0" anchor="t"/>
           <a:lstStyle/>
           <a:p>
-            <a:pPr algn="l" indent="0" marL="0">
-              <a:lnSpc>
-                <a:spcPts val="1680"/>
-              </a:lnSpc>
-              <a:spcBef>
-                <a:spcPts val="300"/>
-              </a:spcBef>
-              <a:spcAft>
-                <a:spcPts val="300"/>
-              </a:spcAft>
-              <a:buNone/>
-            </a:pPr>
-            <a:r>
-              <a:rPr lang="en-US" sz="1200" dirty="0">
+            <a:pPr algn="l" marL="342900" indent="-342900">
+              <a:lnSpc>
+                <a:spcPts val="1620"/>
+              </a:lnSpc>
+              <a:spcAft>
+                <a:spcPts val="300"/>
+              </a:spcAft>
+              <a:buSzPct val="100000"/>
+              <a:buChar char="•"/>
+            </a:pPr>
+            <a:r>
+              <a:rPr lang="en-US" sz="1200" b="1" dirty="0">
                 <a:solidFill>
                   <a:srgbClr val="1A1A1A"/>
                 </a:solidFill>
@@ -4657,15 +5767,171 @@
                 <a:ea typeface="Georgia" pitchFamily="34" charset="-122"/>
                 <a:cs typeface="Georgia" pitchFamily="34" charset="-120"/>
               </a:rPr>
-              <a:t>– Some students will immediately want to "defend Indian culture" against perceived critique. Reframe: precise definition IS defending it. Imprecise defence weakens. – Some will want to dismiss the whole module as "Hindu nationalism." Push: scholarly framing exists; engage it.</a:t>
+              <a:t>"IKS = pre-modern Indian intellectual production"</a:t>
+            </a:r>
+            <a:pPr algn="l" indent="0" marL="0">
+              <a:lnSpc>
+                <a:spcPts val="1620"/>
+              </a:lnSpc>
+              <a:spcAft>
+                <a:spcPts val="300"/>
+              </a:spcAft>
+              <a:buNone/>
+            </a:pPr>
+            <a:r>
+              <a:rPr lang="en-US" sz="1200" dirty="0">
+                <a:solidFill>
+                  <a:srgbClr val="1A1A1A"/>
+                </a:solidFill>
+                <a:latin typeface="Georgia" pitchFamily="34" charset="0"/>
+                <a:ea typeface="Georgia" pitchFamily="34" charset="-122"/>
+                <a:cs typeface="Georgia" pitchFamily="34" charset="-120"/>
+              </a:rPr>
+              <a:t> — Inclusive · Vague boundaries</a:t>
             </a:r>
             <a:endParaRPr lang="en-US" sz="1200" dirty="0"/>
           </a:p>
+          <a:p>
+            <a:pPr algn="l" marL="342900" indent="-342900">
+              <a:lnSpc>
+                <a:spcPts val="1620"/>
+              </a:lnSpc>
+              <a:spcAft>
+                <a:spcPts val="300"/>
+              </a:spcAft>
+              <a:buSzPct val="100000"/>
+              <a:buChar char="•"/>
+            </a:pPr>
+            <a:r>
+              <a:rPr lang="en-US" sz="1200" b="1" dirty="0">
+                <a:solidFill>
+                  <a:srgbClr val="1A1A1A"/>
+                </a:solidFill>
+                <a:latin typeface="Georgia" pitchFamily="34" charset="0"/>
+                <a:ea typeface="Georgia" pitchFamily="34" charset="-122"/>
+                <a:cs typeface="Georgia" pitchFamily="34" charset="-120"/>
+              </a:rPr>
+              <a:t>"IKS = canonical Brahmanical knowledge systems"</a:t>
+            </a:r>
+            <a:pPr algn="l" indent="0" marL="0">
+              <a:lnSpc>
+                <a:spcPts val="1620"/>
+              </a:lnSpc>
+              <a:spcAft>
+                <a:spcPts val="300"/>
+              </a:spcAft>
+              <a:buNone/>
+            </a:pPr>
+            <a:r>
+              <a:rPr lang="en-US" sz="1200" dirty="0">
+                <a:solidFill>
+                  <a:srgbClr val="1A1A1A"/>
+                </a:solidFill>
+                <a:latin typeface="Georgia" pitchFamily="34" charset="0"/>
+                <a:ea typeface="Georgia" pitchFamily="34" charset="-122"/>
+                <a:cs typeface="Georgia" pitchFamily="34" charset="-120"/>
+              </a:rPr>
+              <a:t> — Specific · Excludes Buddhist, Tantric, regional</a:t>
+            </a:r>
+            <a:endParaRPr lang="en-US" sz="1200" dirty="0"/>
+          </a:p>
+          <a:p>
+            <a:pPr algn="l" marL="342900" indent="-342900">
+              <a:lnSpc>
+                <a:spcPts val="1620"/>
+              </a:lnSpc>
+              <a:spcAft>
+                <a:spcPts val="300"/>
+              </a:spcAft>
+              <a:buSzPct val="100000"/>
+              <a:buChar char="•"/>
+            </a:pPr>
+            <a:r>
+              <a:rPr lang="en-US" sz="1200" b="1" dirty="0">
+                <a:solidFill>
+                  <a:srgbClr val="1A1A1A"/>
+                </a:solidFill>
+                <a:latin typeface="Georgia" pitchFamily="34" charset="0"/>
+                <a:ea typeface="Georgia" pitchFamily="34" charset="-122"/>
+                <a:cs typeface="Georgia" pitchFamily="34" charset="-120"/>
+              </a:rPr>
+              <a:t>"IKS = anything taught under the NEP §4.6 umbrella"</a:t>
+            </a:r>
+            <a:pPr algn="l" indent="0" marL="0">
+              <a:lnSpc>
+                <a:spcPts val="1620"/>
+              </a:lnSpc>
+              <a:spcAft>
+                <a:spcPts val="300"/>
+              </a:spcAft>
+              <a:buNone/>
+            </a:pPr>
+            <a:r>
+              <a:rPr lang="en-US" sz="1200" dirty="0">
+                <a:solidFill>
+                  <a:srgbClr val="1A1A1A"/>
+                </a:solidFill>
+                <a:latin typeface="Georgia" pitchFamily="34" charset="0"/>
+                <a:ea typeface="Georgia" pitchFamily="34" charset="-122"/>
+                <a:cs typeface="Georgia" pitchFamily="34" charset="-120"/>
+              </a:rPr>
+              <a:t> — Operational · Political construction; varies by implementer</a:t>
+            </a:r>
+            <a:endParaRPr lang="en-US" sz="1200" dirty="0"/>
+          </a:p>
         </p:txBody>
       </p:sp>
       <p:sp>
         <p:nvSpPr>
           <p:cNvPr id="5" name="Text 3"/>
+          <p:cNvSpPr/>
+          <p:nvPr/>
+        </p:nvSpPr>
+        <p:spPr>
+          <a:xfrm>
+            <a:off x="406301" y="1947565"/>
+            <a:ext cx="8498026" cy="213271"/>
+          </a:xfrm>
+          <a:prstGeom prst="rect">
+            <a:avLst/>
+          </a:prstGeom>
+          <a:noFill/>
+          <a:ln/>
+        </p:spPr>
+        <p:txBody>
+          <a:bodyPr wrap="square" lIns="0" tIns="0" rIns="0" bIns="0" rtlCol="0" anchor="t"/>
+          <a:lstStyle/>
+          <a:p>
+            <a:pPr algn="l" indent="0" marL="0">
+              <a:lnSpc>
+                <a:spcPts val="1680"/>
+              </a:lnSpc>
+              <a:spcBef>
+                <a:spcPts val="300"/>
+              </a:spcBef>
+              <a:spcAft>
+                <a:spcPts val="300"/>
+              </a:spcAft>
+              <a:buNone/>
+            </a:pPr>
+            <a:r>
+              <a:rPr lang="en-US" sz="1200" dirty="0">
+                <a:solidFill>
+                  <a:srgbClr val="1A1A1A"/>
+                </a:solidFill>
+                <a:latin typeface="Georgia" pitchFamily="34" charset="0"/>
+                <a:ea typeface="Georgia" pitchFamily="34" charset="-122"/>
+                <a:cs typeface="Georgia" pitchFamily="34" charset="-120"/>
+              </a:rPr>
+              <a:t>Each is defensible. Pick one knowingly, not by default.</a:t>
+            </a:r>
+            <a:endParaRPr lang="en-US" sz="1200" dirty="0"/>
+          </a:p>
+        </p:txBody>
+      </p:sp>
+      <p:sp>
+        <p:nvSpPr>
+          <p:cNvPr id="6" name="Text 4"/>
           <p:cNvSpPr/>
           <p:nvPr/>
         </p:nvSpPr>
